--- a/cours/Module TIC/Série Officielle 01-10/Cours_TIC_10_Services_Internet_EN.pptx
+++ b/cours/Module TIC/Série Officielle 01-10/Cours_TIC_10_Services_Internet_EN.pptx
@@ -2856,7 +2856,7 @@
           <a:solidFill>
             <a:schemeClr val="tx1"/>
           </a:solidFill>
-          <a:latin typeface="+mj-lt"/>
+          <a:latin typeface="Poppins"/>
           <a:ea typeface="+mj-ea"/>
           <a:cs typeface="+mj-cs"/>
         </a:defRPr>
@@ -2873,7 +2873,7 @@
           <a:solidFill>
             <a:schemeClr val="tx1"/>
           </a:solidFill>
-          <a:latin typeface="+mn-lt"/>
+          <a:latin typeface="Poppins"/>
           <a:ea typeface="+mn-ea"/>
           <a:cs typeface="+mn-cs"/>
         </a:defRPr>
@@ -2888,7 +2888,7 @@
           <a:solidFill>
             <a:schemeClr val="tx1"/>
           </a:solidFill>
-          <a:latin typeface="+mn-lt"/>
+          <a:latin typeface="Poppins"/>
           <a:ea typeface="+mn-ea"/>
           <a:cs typeface="+mn-cs"/>
         </a:defRPr>
@@ -2903,7 +2903,7 @@
           <a:solidFill>
             <a:schemeClr val="tx1"/>
           </a:solidFill>
-          <a:latin typeface="+mn-lt"/>
+          <a:latin typeface="Poppins"/>
           <a:ea typeface="+mn-ea"/>
           <a:cs typeface="+mn-cs"/>
         </a:defRPr>
@@ -2918,7 +2918,7 @@
           <a:solidFill>
             <a:schemeClr val="tx1"/>
           </a:solidFill>
-          <a:latin typeface="+mn-lt"/>
+          <a:latin typeface="Poppins"/>
           <a:ea typeface="+mn-ea"/>
           <a:cs typeface="+mn-cs"/>
         </a:defRPr>
@@ -2933,7 +2933,7 @@
           <a:solidFill>
             <a:schemeClr val="tx1"/>
           </a:solidFill>
-          <a:latin typeface="+mn-lt"/>
+          <a:latin typeface="Poppins"/>
           <a:ea typeface="+mn-ea"/>
           <a:cs typeface="+mn-cs"/>
         </a:defRPr>
@@ -2948,7 +2948,7 @@
           <a:solidFill>
             <a:schemeClr val="tx1"/>
           </a:solidFill>
-          <a:latin typeface="+mn-lt"/>
+          <a:latin typeface="Poppins"/>
           <a:ea typeface="+mn-ea"/>
           <a:cs typeface="+mn-cs"/>
         </a:defRPr>
@@ -2963,7 +2963,7 @@
           <a:solidFill>
             <a:schemeClr val="tx1"/>
           </a:solidFill>
-          <a:latin typeface="+mn-lt"/>
+          <a:latin typeface="Poppins"/>
           <a:ea typeface="+mn-ea"/>
           <a:cs typeface="+mn-cs"/>
         </a:defRPr>
@@ -2978,7 +2978,7 @@
           <a:solidFill>
             <a:schemeClr val="tx1"/>
           </a:solidFill>
-          <a:latin typeface="+mn-lt"/>
+          <a:latin typeface="Poppins"/>
           <a:ea typeface="+mn-ea"/>
           <a:cs typeface="+mn-cs"/>
         </a:defRPr>
@@ -2993,7 +2993,7 @@
           <a:solidFill>
             <a:schemeClr val="tx1"/>
           </a:solidFill>
-          <a:latin typeface="+mn-lt"/>
+          <a:latin typeface="Poppins"/>
           <a:ea typeface="+mn-ea"/>
           <a:cs typeface="+mn-cs"/>
         </a:defRPr>
@@ -3008,7 +3008,7 @@
           <a:solidFill>
             <a:schemeClr val="tx1"/>
           </a:solidFill>
-          <a:latin typeface="+mn-lt"/>
+          <a:latin typeface="Poppins"/>
           <a:ea typeface="+mn-ea"/>
           <a:cs typeface="+mn-cs"/>
         </a:defRPr>
@@ -3018,7 +3018,7 @@
           <a:solidFill>
             <a:schemeClr val="tx1"/>
           </a:solidFill>
-          <a:latin typeface="+mn-lt"/>
+          <a:latin typeface="Poppins"/>
           <a:ea typeface="+mn-ea"/>
           <a:cs typeface="+mn-cs"/>
         </a:defRPr>
@@ -3028,7 +3028,7 @@
           <a:solidFill>
             <a:schemeClr val="tx1"/>
           </a:solidFill>
-          <a:latin typeface="+mn-lt"/>
+          <a:latin typeface="Poppins"/>
           <a:ea typeface="+mn-ea"/>
           <a:cs typeface="+mn-cs"/>
         </a:defRPr>
@@ -3038,7 +3038,7 @@
           <a:solidFill>
             <a:schemeClr val="tx1"/>
           </a:solidFill>
-          <a:latin typeface="+mn-lt"/>
+          <a:latin typeface="Poppins"/>
           <a:ea typeface="+mn-ea"/>
           <a:cs typeface="+mn-cs"/>
         </a:defRPr>
@@ -3048,7 +3048,7 @@
           <a:solidFill>
             <a:schemeClr val="tx1"/>
           </a:solidFill>
-          <a:latin typeface="+mn-lt"/>
+          <a:latin typeface="Poppins"/>
           <a:ea typeface="+mn-ea"/>
           <a:cs typeface="+mn-cs"/>
         </a:defRPr>
@@ -3058,7 +3058,7 @@
           <a:solidFill>
             <a:schemeClr val="tx1"/>
           </a:solidFill>
-          <a:latin typeface="+mn-lt"/>
+          <a:latin typeface="Poppins"/>
           <a:ea typeface="+mn-ea"/>
           <a:cs typeface="+mn-cs"/>
         </a:defRPr>
@@ -3068,7 +3068,7 @@
           <a:solidFill>
             <a:schemeClr val="tx1"/>
           </a:solidFill>
-          <a:latin typeface="+mn-lt"/>
+          <a:latin typeface="Poppins"/>
           <a:ea typeface="+mn-ea"/>
           <a:cs typeface="+mn-cs"/>
         </a:defRPr>
@@ -3078,7 +3078,7 @@
           <a:solidFill>
             <a:schemeClr val="tx1"/>
           </a:solidFill>
-          <a:latin typeface="+mn-lt"/>
+          <a:latin typeface="Poppins"/>
           <a:ea typeface="+mn-ea"/>
           <a:cs typeface="+mn-cs"/>
         </a:defRPr>
@@ -3088,7 +3088,7 @@
           <a:solidFill>
             <a:schemeClr val="tx1"/>
           </a:solidFill>
-          <a:latin typeface="+mn-lt"/>
+          <a:latin typeface="Poppins"/>
           <a:ea typeface="+mn-ea"/>
           <a:cs typeface="+mn-cs"/>
         </a:defRPr>
@@ -3103,9 +3103,7 @@
   <p:cSld>
     <p:bg>
       <p:bgPr>
-        <a:solidFill>
-          <a:srgbClr val="0B3D2E"/>
-        </a:solidFill>
+        <a:solidFill>val="004A38"/&gt;</a:solidFill>
         <a:effectLst/>
       </p:bgPr>
     </p:bg>
@@ -3130,9 +3128,7 @@
           <a:prstGeom prst="rect">
             <a:avLst/>
           </a:prstGeom>
-          <a:solidFill>
-            <a:srgbClr val="146B4A"/>
-          </a:solidFill>
+          <a:solidFill>val="007A55"/&gt;</a:solidFill>
           <a:ln>
             <a:noFill/>
           </a:ln>
@@ -3174,9 +3170,7 @@
           <a:prstGeom prst="rect">
             <a:avLst/>
           </a:prstGeom>
-          <a:solidFill>
-            <a:srgbClr val="FFD700"/>
-          </a:solidFill>
+          <a:solidFill>val="F0B429"/&gt;</a:solidFill>
           <a:ln>
             <a:noFill/>
           </a:ln>
@@ -3218,9 +3212,7 @@
           <a:prstGeom prst="rect">
             <a:avLst/>
           </a:prstGeom>
-          <a:solidFill>
-            <a:srgbClr val="FFD700"/>
-          </a:solidFill>
+          <a:solidFill>val="F0B429"/&gt;</a:solidFill>
           <a:ln>
             <a:noFill/>
           </a:ln>
@@ -3262,9 +3254,7 @@
           <a:prstGeom prst="rect">
             <a:avLst/>
           </a:prstGeom>
-          <a:solidFill>
-            <a:srgbClr val="146B4A"/>
-          </a:solidFill>
+          <a:solidFill>val="007A55"/&gt;</a:solidFill>
           <a:ln>
             <a:noFill/>
           </a:ln>
@@ -3306,9 +3296,7 @@
           <a:prstGeom prst="rect">
             <a:avLst/>
           </a:prstGeom>
-          <a:solidFill>
-            <a:srgbClr val="FFD700"/>
-          </a:solidFill>
+          <a:solidFill>val="F0B429"/&gt;</a:solidFill>
           <a:ln>
             <a:noFill/>
           </a:ln>
@@ -3361,10 +3349,8 @@
             <a:pPr algn="ctr"/>
             <a:r>
               <a:rPr sz="4000" b="1" i="0">
-                <a:solidFill>
-                  <a:srgbClr val="FFD700"/>
-                </a:solidFill>
-                <a:latin typeface="Calibri"/>
+                <a:solidFill>val="F0B429"/&gt;</a:solidFill>
+                <a:latin typeface="Poppins"/>
               </a:rPr>
               <a:t>TIC COURSE 10</a:t>
             </a:r>
@@ -3396,10 +3382,8 @@
             <a:pPr algn="ctr"/>
             <a:r>
               <a:rPr sz="3000" b="1" i="0">
-                <a:solidFill>
-                  <a:srgbClr val="FFFFFF"/>
-                </a:solidFill>
-                <a:latin typeface="Calibri"/>
+                <a:solidFill>val="FFFFFF"/&gt;</a:solidFill>
+                <a:latin typeface="Poppins"/>
               </a:rPr>
               <a:t>Internet Services</a:t>
             </a:r>
@@ -3420,9 +3404,7 @@
           <a:prstGeom prst="rect">
             <a:avLst/>
           </a:prstGeom>
-          <a:solidFill>
-            <a:srgbClr val="146B4A"/>
-          </a:solidFill>
+          <a:solidFill>val="007A55"/&gt;</a:solidFill>
           <a:ln>
             <a:noFill/>
           </a:ln>
@@ -3475,10 +3457,8 @@
             <a:pPr algn="ctr"/>
             <a:r>
               <a:rPr sz="1800" b="0" i="0">
-                <a:solidFill>
-                  <a:srgbClr val="BBBBBB"/>
-                </a:solidFill>
-                <a:latin typeface="Calibri"/>
+                <a:solidFill>val="9AA7B6"/&gt;</a:solidFill>
+                <a:latin typeface="Poppins"/>
               </a:rPr>
               <a:t>Dr. BELACEL Madani</a:t>
             </a:r>
@@ -3510,10 +3490,8 @@
             <a:pPr algn="ctr"/>
             <a:r>
               <a:rPr sz="1400" b="0" i="1">
-                <a:solidFill>
-                  <a:srgbClr val="BBBBBB"/>
-                </a:solidFill>
-                <a:latin typeface="Calibri"/>
+                <a:solidFill>val="9AA7B6"/&gt;</a:solidFill>
+                <a:latin typeface="Poppins"/>
               </a:rPr>
               <a:t>Année universitaire 2026-2027 / Academic Year 2026-2027</a:t>
             </a:r>
@@ -3545,10 +3523,8 @@
             <a:pPr algn="ctr"/>
             <a:r>
               <a:rPr sz="1200" b="0" i="1">
-                <a:solidFill>
-                  <a:srgbClr val="BBBBBB"/>
-                </a:solidFill>
-                <a:latin typeface="Calibri"/>
+                <a:solidFill>val="9AA7B6"/&gt;</a:solidFill>
+                <a:latin typeface="Poppins"/>
               </a:rPr>
               <a:t>Université de Mostaganem - Département Mathématiques et Informatique</a:t>
             </a:r>
@@ -3579,6 +3555,47 @@
           </a:prstGeom>
         </p:spPr>
       </p:pic>
+      <p:sp>
+        <p:nvSpPr>
+          <p:cNvPr id="990001" name="Pied de page FLE"/>
+          <p:cNvSpPr>
+            <a:spLocks noGrp="1"/>
+          </p:cNvSpPr>
+          <p:nvPr/>
+        </p:nvSpPr>
+        <p:spPr>
+          <a:xfrm>
+            <a:off x="4343400" y="-329184"/>
+            <a:ext cx="4572000" cy="274320"/>
+          </a:xfrm>
+          <a:prstGeom prst="rect">
+            <a:avLst/>
+          </a:prstGeom>
+        </p:spPr>
+        <p:txBody>
+          <a:bodyPr anchor="b"/>
+          <a:lstStyle/>
+          <a:p>
+            <a:pPr algn="r">
+              <a:defRPr sz="900">
+                <a:solidFill>
+                  <a:srgbClr val="9AA7B6"/>
+                </a:solidFill>
+                <a:latin typeface="Poppins"/>
+              </a:defRPr>
+            </a:pPr>
+            <a:r>
+              <a:rPr lang="fr-FR" sz="900">
+                <a:solidFill>
+                  <a:srgbClr val="9AA7B6"/>
+                </a:solidFill>
+                <a:latin typeface="Poppins"/>
+              </a:rPr>
+              <a:t>Université de Mostaganem — Dr. Madani BELACEL</a:t>
+            </a:r>
+          </a:p>
+        </p:txBody>
+      </p:sp>
     </p:spTree>
   </p:cSld>
   <p:clrMapOvr>
@@ -3592,9 +3609,7 @@
   <p:cSld>
     <p:bg>
       <p:bgPr>
-        <a:solidFill>
-          <a:srgbClr val="0B3D2E"/>
-        </a:solidFill>
+        <a:solidFill>val="004A38"/&gt;</a:solidFill>
         <a:effectLst/>
       </p:bgPr>
     </p:bg>
@@ -3619,9 +3634,7 @@
           <a:prstGeom prst="rect">
             <a:avLst/>
           </a:prstGeom>
-          <a:solidFill>
-            <a:srgbClr val="146B4A"/>
-          </a:solidFill>
+          <a:solidFill>val="007A55"/&gt;</a:solidFill>
           <a:ln>
             <a:noFill/>
           </a:ln>
@@ -3663,9 +3676,7 @@
           <a:prstGeom prst="rect">
             <a:avLst/>
           </a:prstGeom>
-          <a:solidFill>
-            <a:srgbClr val="FFD700"/>
-          </a:solidFill>
+          <a:solidFill>val="F0B429"/&gt;</a:solidFill>
           <a:ln>
             <a:noFill/>
           </a:ln>
@@ -3707,9 +3718,7 @@
           <a:prstGeom prst="rect">
             <a:avLst/>
           </a:prstGeom>
-          <a:solidFill>
-            <a:srgbClr val="FFD700"/>
-          </a:solidFill>
+          <a:solidFill>val="F0B429"/&gt;</a:solidFill>
           <a:ln>
             <a:noFill/>
           </a:ln>
@@ -3751,9 +3760,7 @@
           <a:prstGeom prst="rect">
             <a:avLst/>
           </a:prstGeom>
-          <a:solidFill>
-            <a:srgbClr val="146B4A"/>
-          </a:solidFill>
+          <a:solidFill>val="007A55"/&gt;</a:solidFill>
           <a:ln>
             <a:noFill/>
           </a:ln>
@@ -3806,10 +3813,8 @@
             <a:pPr algn="l"/>
             <a:r>
               <a:rPr sz="2400" b="1" i="0">
-                <a:solidFill>
-                  <a:srgbClr val="FFD700"/>
-                </a:solidFill>
-                <a:latin typeface="Calibri"/>
+                <a:solidFill>val="F0B429"/&gt;</a:solidFill>
+                <a:latin typeface="Poppins"/>
               </a:rPr>
               <a:t>4 - E-commerce and Online Services</a:t>
             </a:r>
@@ -3830,9 +3835,7 @@
           <a:prstGeom prst="rect">
             <a:avLst/>
           </a:prstGeom>
-          <a:solidFill>
-            <a:srgbClr val="146B4A"/>
-          </a:solidFill>
+          <a:solidFill>val="007A55"/&gt;</a:solidFill>
           <a:ln>
             <a:noFill/>
           </a:ln>
@@ -3889,10 +3892,8 @@
             </a:pPr>
             <a:r>
               <a:rPr sz="1800">
-                <a:solidFill>
-                  <a:srgbClr val="FFFFFF"/>
-                </a:solidFill>
-                <a:latin typeface="Calibri"/>
+                <a:solidFill>val="FFFFFF"/&gt;</a:solidFill>
+                <a:latin typeface="Poppins"/>
               </a:rPr>
               <a:t>▪  Online shopping: Amazon, Jumia, local stores.</a:t>
             </a:r>
@@ -3905,10 +3906,8 @@
             </a:pPr>
             <a:r>
               <a:rPr sz="1800">
-                <a:solidFill>
-                  <a:srgbClr val="FFFFFF"/>
-                </a:solidFill>
-                <a:latin typeface="Calibri"/>
+                <a:solidFill>val="FFFFFF"/&gt;</a:solidFill>
+                <a:latin typeface="Poppins"/>
               </a:rPr>
               <a:t>▪  Electronic payment: CIB, EDAHABIA, bank cards.</a:t>
             </a:r>
@@ -3921,10 +3920,8 @@
             </a:pPr>
             <a:r>
               <a:rPr sz="1800">
-                <a:solidFill>
-                  <a:srgbClr val="FFFFFF"/>
-                </a:solidFill>
-                <a:latin typeface="Calibri"/>
+                <a:solidFill>val="FFFFFF"/&gt;</a:solidFill>
+                <a:latin typeface="Poppins"/>
               </a:rPr>
               <a:t>▪  Online banking and digital wallets.</a:t>
             </a:r>
@@ -3937,10 +3934,8 @@
             </a:pPr>
             <a:r>
               <a:rPr sz="1800">
-                <a:solidFill>
-                  <a:srgbClr val="FFFFFF"/>
-                </a:solidFill>
-                <a:latin typeface="Calibri"/>
+                <a:solidFill>val="FFFFFF"/&gt;</a:solidFill>
+                <a:latin typeface="Poppins"/>
               </a:rPr>
               <a:t>▪  Digital government: taxes, university registration.</a:t>
             </a:r>
@@ -3971,6 +3966,47 @@
           </a:prstGeom>
         </p:spPr>
       </p:pic>
+      <p:sp>
+        <p:nvSpPr>
+          <p:cNvPr id="990001" name="Pied de page FLE"/>
+          <p:cNvSpPr>
+            <a:spLocks noGrp="1"/>
+          </p:cNvSpPr>
+          <p:nvPr/>
+        </p:nvSpPr>
+        <p:spPr>
+          <a:xfrm>
+            <a:off x="4343400" y="-329184"/>
+            <a:ext cx="4572000" cy="274320"/>
+          </a:xfrm>
+          <a:prstGeom prst="rect">
+            <a:avLst/>
+          </a:prstGeom>
+        </p:spPr>
+        <p:txBody>
+          <a:bodyPr anchor="b"/>
+          <a:lstStyle/>
+          <a:p>
+            <a:pPr algn="r">
+              <a:defRPr sz="900">
+                <a:solidFill>
+                  <a:srgbClr val="9AA7B6"/>
+                </a:solidFill>
+                <a:latin typeface="Poppins"/>
+              </a:defRPr>
+            </a:pPr>
+            <a:r>
+              <a:rPr lang="fr-FR" sz="900">
+                <a:solidFill>
+                  <a:srgbClr val="9AA7B6"/>
+                </a:solidFill>
+                <a:latin typeface="Poppins"/>
+              </a:rPr>
+              <a:t>Université de Mostaganem — Dr. Madani BELACEL</a:t>
+            </a:r>
+          </a:p>
+        </p:txBody>
+      </p:sp>
     </p:spTree>
   </p:cSld>
   <p:clrMapOvr>
@@ -3984,9 +4020,7 @@
   <p:cSld>
     <p:bg>
       <p:bgPr>
-        <a:solidFill>
-          <a:srgbClr val="0B3D2E"/>
-        </a:solidFill>
+        <a:solidFill>val="004A38"/&gt;</a:solidFill>
         <a:effectLst/>
       </p:bgPr>
     </p:bg>
@@ -4011,9 +4045,7 @@
           <a:prstGeom prst="rect">
             <a:avLst/>
           </a:prstGeom>
-          <a:solidFill>
-            <a:srgbClr val="146B4A"/>
-          </a:solidFill>
+          <a:solidFill>val="007A55"/&gt;</a:solidFill>
           <a:ln>
             <a:noFill/>
           </a:ln>
@@ -4055,9 +4087,7 @@
           <a:prstGeom prst="rect">
             <a:avLst/>
           </a:prstGeom>
-          <a:solidFill>
-            <a:srgbClr val="FFD700"/>
-          </a:solidFill>
+          <a:solidFill>val="F0B429"/&gt;</a:solidFill>
           <a:ln>
             <a:noFill/>
           </a:ln>
@@ -4099,9 +4129,7 @@
           <a:prstGeom prst="rect">
             <a:avLst/>
           </a:prstGeom>
-          <a:solidFill>
-            <a:srgbClr val="FFD700"/>
-          </a:solidFill>
+          <a:solidFill>val="F0B429"/&gt;</a:solidFill>
           <a:ln>
             <a:noFill/>
           </a:ln>
@@ -4143,9 +4171,7 @@
           <a:prstGeom prst="rect">
             <a:avLst/>
           </a:prstGeom>
-          <a:solidFill>
-            <a:srgbClr val="146B4A"/>
-          </a:solidFill>
+          <a:solidFill>val="007A55"/&gt;</a:solidFill>
           <a:ln>
             <a:noFill/>
           </a:ln>
@@ -4187,9 +4213,7 @@
           <a:prstGeom prst="rect">
             <a:avLst/>
           </a:prstGeom>
-          <a:solidFill>
-            <a:srgbClr val="146B4A"/>
-          </a:solidFill>
+          <a:solidFill>val="007A55"/&gt;</a:solidFill>
           <a:ln>
             <a:noFill/>
           </a:ln>
@@ -4242,10 +4266,8 @@
             <a:pPr algn="ctr"/>
             <a:r>
               <a:rPr sz="2200" b="1" i="0">
-                <a:solidFill>
-                  <a:srgbClr val="BBBBBB"/>
-                </a:solidFill>
-                <a:latin typeface="Calibri"/>
+                <a:solidFill>val="9AA7B6"/&gt;</a:solidFill>
+                <a:latin typeface="Poppins"/>
               </a:rPr>
               <a:t>Section 5</a:t>
             </a:r>
@@ -4277,10 +4299,8 @@
             <a:pPr algn="ctr"/>
             <a:r>
               <a:rPr sz="2800" b="1" i="0">
-                <a:solidFill>
-                  <a:srgbClr val="FFD700"/>
-                </a:solidFill>
-                <a:latin typeface="Calibri"/>
+                <a:solidFill>val="F0B429"/&gt;</a:solidFill>
+                <a:latin typeface="Poppins"/>
               </a:rPr>
               <a:t>Social Media</a:t>
             </a:r>
@@ -4311,6 +4331,47 @@
           </a:prstGeom>
         </p:spPr>
       </p:pic>
+      <p:sp>
+        <p:nvSpPr>
+          <p:cNvPr id="990001" name="Pied de page FLE"/>
+          <p:cNvSpPr>
+            <a:spLocks noGrp="1"/>
+          </p:cNvSpPr>
+          <p:nvPr/>
+        </p:nvSpPr>
+        <p:spPr>
+          <a:xfrm>
+            <a:off x="4343400" y="-329184"/>
+            <a:ext cx="4572000" cy="274320"/>
+          </a:xfrm>
+          <a:prstGeom prst="rect">
+            <a:avLst/>
+          </a:prstGeom>
+        </p:spPr>
+        <p:txBody>
+          <a:bodyPr anchor="b"/>
+          <a:lstStyle/>
+          <a:p>
+            <a:pPr algn="r">
+              <a:defRPr sz="900">
+                <a:solidFill>
+                  <a:srgbClr val="9AA7B6"/>
+                </a:solidFill>
+                <a:latin typeface="Poppins"/>
+              </a:defRPr>
+            </a:pPr>
+            <a:r>
+              <a:rPr lang="fr-FR" sz="900">
+                <a:solidFill>
+                  <a:srgbClr val="9AA7B6"/>
+                </a:solidFill>
+                <a:latin typeface="Poppins"/>
+              </a:rPr>
+              <a:t>Université de Mostaganem — Dr. Madani BELACEL</a:t>
+            </a:r>
+          </a:p>
+        </p:txBody>
+      </p:sp>
     </p:spTree>
   </p:cSld>
   <p:clrMapOvr>
@@ -4324,9 +4385,7 @@
   <p:cSld>
     <p:bg>
       <p:bgPr>
-        <a:solidFill>
-          <a:srgbClr val="0B3D2E"/>
-        </a:solidFill>
+        <a:solidFill>val="004A38"/&gt;</a:solidFill>
         <a:effectLst/>
       </p:bgPr>
     </p:bg>
@@ -4351,9 +4410,7 @@
           <a:prstGeom prst="rect">
             <a:avLst/>
           </a:prstGeom>
-          <a:solidFill>
-            <a:srgbClr val="146B4A"/>
-          </a:solidFill>
+          <a:solidFill>val="007A55"/&gt;</a:solidFill>
           <a:ln>
             <a:noFill/>
           </a:ln>
@@ -4395,9 +4452,7 @@
           <a:prstGeom prst="rect">
             <a:avLst/>
           </a:prstGeom>
-          <a:solidFill>
-            <a:srgbClr val="FFD700"/>
-          </a:solidFill>
+          <a:solidFill>val="F0B429"/&gt;</a:solidFill>
           <a:ln>
             <a:noFill/>
           </a:ln>
@@ -4439,9 +4494,7 @@
           <a:prstGeom prst="rect">
             <a:avLst/>
           </a:prstGeom>
-          <a:solidFill>
-            <a:srgbClr val="FFD700"/>
-          </a:solidFill>
+          <a:solidFill>val="F0B429"/&gt;</a:solidFill>
           <a:ln>
             <a:noFill/>
           </a:ln>
@@ -4483,9 +4536,7 @@
           <a:prstGeom prst="rect">
             <a:avLst/>
           </a:prstGeom>
-          <a:solidFill>
-            <a:srgbClr val="146B4A"/>
-          </a:solidFill>
+          <a:solidFill>val="007A55"/&gt;</a:solidFill>
           <a:ln>
             <a:noFill/>
           </a:ln>
@@ -4538,10 +4589,8 @@
             <a:pPr algn="l"/>
             <a:r>
               <a:rPr sz="2400" b="1" i="0">
-                <a:solidFill>
-                  <a:srgbClr val="FFD700"/>
-                </a:solidFill>
-                <a:latin typeface="Calibri"/>
+                <a:solidFill>val="F0B429"/&gt;</a:solidFill>
+                <a:latin typeface="Poppins"/>
               </a:rPr>
               <a:t>5 - Social Media</a:t>
             </a:r>
@@ -4562,9 +4611,7 @@
           <a:prstGeom prst="rect">
             <a:avLst/>
           </a:prstGeom>
-          <a:solidFill>
-            <a:srgbClr val="146B4A"/>
-          </a:solidFill>
+          <a:solidFill>val="007A55"/&gt;</a:solidFill>
           <a:ln>
             <a:noFill/>
           </a:ln>
@@ -4621,10 +4668,8 @@
             </a:pPr>
             <a:r>
               <a:rPr sz="1800">
-                <a:solidFill>
-                  <a:srgbClr val="FFFFFF"/>
-                </a:solidFill>
-                <a:latin typeface="Calibri"/>
+                <a:solidFill>val="FFFFFF"/&gt;</a:solidFill>
+                <a:latin typeface="Poppins"/>
               </a:rPr>
               <a:t>▪  Facebook, Instagram, X (Twitter), LinkedIn, TikTok.</a:t>
             </a:r>
@@ -4637,10 +4682,8 @@
             </a:pPr>
             <a:r>
               <a:rPr sz="1800">
-                <a:solidFill>
-                  <a:srgbClr val="FFFFFF"/>
-                </a:solidFill>
-                <a:latin typeface="Calibri"/>
+                <a:solidFill>val="FFFFFF"/&gt;</a:solidFill>
+                <a:latin typeface="Poppins"/>
               </a:rPr>
               <a:t>▪  Personal and professional uses (LinkedIn = virtual CV).</a:t>
             </a:r>
@@ -4653,10 +4696,8 @@
             </a:pPr>
             <a:r>
               <a:rPr sz="1800">
-                <a:solidFill>
-                  <a:srgbClr val="FFFFFF"/>
-                </a:solidFill>
-                <a:latin typeface="Calibri"/>
+                <a:solidFill>val="FFFFFF"/&gt;</a:solidFill>
+                <a:latin typeface="Poppins"/>
               </a:rPr>
               <a:t>▪  Recommendation algorithms and filter bubbles.</a:t>
             </a:r>
@@ -4669,10 +4710,8 @@
             </a:pPr>
             <a:r>
               <a:rPr sz="1800">
-                <a:solidFill>
-                  <a:srgbClr val="FFFFFF"/>
-                </a:solidFill>
-                <a:latin typeface="Calibri"/>
+                <a:solidFill>val="FFFFFF"/&gt;</a:solidFill>
+                <a:latin typeface="Poppins"/>
               </a:rPr>
               <a:t>▪  Risks: disinformation, cyberbullying, privacy invasion.</a:t>
             </a:r>
@@ -4685,10 +4724,8 @@
             </a:pPr>
             <a:r>
               <a:rPr sz="1800">
-                <a:solidFill>
-                  <a:srgbClr val="FFFFFF"/>
-                </a:solidFill>
-                <a:latin typeface="Calibri"/>
+                <a:solidFill>val="FFFFFF"/&gt;</a:solidFill>
+                <a:latin typeface="Poppins"/>
               </a:rPr>
               <a:t>▪  Good practice: configure privacy settings.</a:t>
             </a:r>
@@ -4719,6 +4756,47 @@
           </a:prstGeom>
         </p:spPr>
       </p:pic>
+      <p:sp>
+        <p:nvSpPr>
+          <p:cNvPr id="990001" name="Pied de page FLE"/>
+          <p:cNvSpPr>
+            <a:spLocks noGrp="1"/>
+          </p:cNvSpPr>
+          <p:nvPr/>
+        </p:nvSpPr>
+        <p:spPr>
+          <a:xfrm>
+            <a:off x="4343400" y="-329184"/>
+            <a:ext cx="4572000" cy="274320"/>
+          </a:xfrm>
+          <a:prstGeom prst="rect">
+            <a:avLst/>
+          </a:prstGeom>
+        </p:spPr>
+        <p:txBody>
+          <a:bodyPr anchor="b"/>
+          <a:lstStyle/>
+          <a:p>
+            <a:pPr algn="r">
+              <a:defRPr sz="900">
+                <a:solidFill>
+                  <a:srgbClr val="9AA7B6"/>
+                </a:solidFill>
+                <a:latin typeface="Poppins"/>
+              </a:defRPr>
+            </a:pPr>
+            <a:r>
+              <a:rPr lang="fr-FR" sz="900">
+                <a:solidFill>
+                  <a:srgbClr val="9AA7B6"/>
+                </a:solidFill>
+                <a:latin typeface="Poppins"/>
+              </a:rPr>
+              <a:t>Université de Mostaganem — Dr. Madani BELACEL</a:t>
+            </a:r>
+          </a:p>
+        </p:txBody>
+      </p:sp>
     </p:spTree>
   </p:cSld>
   <p:clrMapOvr>
@@ -4732,9 +4810,7 @@
   <p:cSld>
     <p:bg>
       <p:bgPr>
-        <a:solidFill>
-          <a:srgbClr val="0B3D2E"/>
-        </a:solidFill>
+        <a:solidFill>val="004A38"/&gt;</a:solidFill>
         <a:effectLst/>
       </p:bgPr>
     </p:bg>
@@ -4759,9 +4835,7 @@
           <a:prstGeom prst="rect">
             <a:avLst/>
           </a:prstGeom>
-          <a:solidFill>
-            <a:srgbClr val="146B4A"/>
-          </a:solidFill>
+          <a:solidFill>val="007A55"/&gt;</a:solidFill>
           <a:ln>
             <a:noFill/>
           </a:ln>
@@ -4803,9 +4877,7 @@
           <a:prstGeom prst="rect">
             <a:avLst/>
           </a:prstGeom>
-          <a:solidFill>
-            <a:srgbClr val="FFD700"/>
-          </a:solidFill>
+          <a:solidFill>val="F0B429"/&gt;</a:solidFill>
           <a:ln>
             <a:noFill/>
           </a:ln>
@@ -4847,9 +4919,7 @@
           <a:prstGeom prst="rect">
             <a:avLst/>
           </a:prstGeom>
-          <a:solidFill>
-            <a:srgbClr val="FFD700"/>
-          </a:solidFill>
+          <a:solidFill>val="F0B429"/&gt;</a:solidFill>
           <a:ln>
             <a:noFill/>
           </a:ln>
@@ -4891,9 +4961,7 @@
           <a:prstGeom prst="rect">
             <a:avLst/>
           </a:prstGeom>
-          <a:solidFill>
-            <a:srgbClr val="146B4A"/>
-          </a:solidFill>
+          <a:solidFill>val="007A55"/&gt;</a:solidFill>
           <a:ln>
             <a:noFill/>
           </a:ln>
@@ -4935,9 +5003,7 @@
           <a:prstGeom prst="rect">
             <a:avLst/>
           </a:prstGeom>
-          <a:solidFill>
-            <a:srgbClr val="146B4A"/>
-          </a:solidFill>
+          <a:solidFill>val="007A55"/&gt;</a:solidFill>
           <a:ln>
             <a:noFill/>
           </a:ln>
@@ -4990,10 +5056,8 @@
             <a:pPr algn="ctr"/>
             <a:r>
               <a:rPr sz="2200" b="1" i="0">
-                <a:solidFill>
-                  <a:srgbClr val="BBBBBB"/>
-                </a:solidFill>
-                <a:latin typeface="Calibri"/>
+                <a:solidFill>val="9AA7B6"/&gt;</a:solidFill>
+                <a:latin typeface="Poppins"/>
               </a:rPr>
               <a:t>Section 6</a:t>
             </a:r>
@@ -5025,10 +5089,8 @@
             <a:pPr algn="ctr"/>
             <a:r>
               <a:rPr sz="2800" b="1" i="0">
-                <a:solidFill>
-                  <a:srgbClr val="FFD700"/>
-                </a:solidFill>
-                <a:latin typeface="Calibri"/>
+                <a:solidFill>val="F0B429"/&gt;</a:solidFill>
+                <a:latin typeface="Poppins"/>
               </a:rPr>
               <a:t>Security of Online Services</a:t>
             </a:r>
@@ -5059,6 +5121,47 @@
           </a:prstGeom>
         </p:spPr>
       </p:pic>
+      <p:sp>
+        <p:nvSpPr>
+          <p:cNvPr id="990001" name="Pied de page FLE"/>
+          <p:cNvSpPr>
+            <a:spLocks noGrp="1"/>
+          </p:cNvSpPr>
+          <p:nvPr/>
+        </p:nvSpPr>
+        <p:spPr>
+          <a:xfrm>
+            <a:off x="4343400" y="-329184"/>
+            <a:ext cx="4572000" cy="274320"/>
+          </a:xfrm>
+          <a:prstGeom prst="rect">
+            <a:avLst/>
+          </a:prstGeom>
+        </p:spPr>
+        <p:txBody>
+          <a:bodyPr anchor="b"/>
+          <a:lstStyle/>
+          <a:p>
+            <a:pPr algn="r">
+              <a:defRPr sz="900">
+                <a:solidFill>
+                  <a:srgbClr val="9AA7B6"/>
+                </a:solidFill>
+                <a:latin typeface="Poppins"/>
+              </a:defRPr>
+            </a:pPr>
+            <a:r>
+              <a:rPr lang="fr-FR" sz="900">
+                <a:solidFill>
+                  <a:srgbClr val="9AA7B6"/>
+                </a:solidFill>
+                <a:latin typeface="Poppins"/>
+              </a:rPr>
+              <a:t>Université de Mostaganem — Dr. Madani BELACEL</a:t>
+            </a:r>
+          </a:p>
+        </p:txBody>
+      </p:sp>
     </p:spTree>
   </p:cSld>
   <p:clrMapOvr>
@@ -5072,9 +5175,7 @@
   <p:cSld>
     <p:bg>
       <p:bgPr>
-        <a:solidFill>
-          <a:srgbClr val="0B3D2E"/>
-        </a:solidFill>
+        <a:solidFill>val="004A38"/&gt;</a:solidFill>
         <a:effectLst/>
       </p:bgPr>
     </p:bg>
@@ -5099,9 +5200,7 @@
           <a:prstGeom prst="rect">
             <a:avLst/>
           </a:prstGeom>
-          <a:solidFill>
-            <a:srgbClr val="146B4A"/>
-          </a:solidFill>
+          <a:solidFill>val="007A55"/&gt;</a:solidFill>
           <a:ln>
             <a:noFill/>
           </a:ln>
@@ -5143,9 +5242,7 @@
           <a:prstGeom prst="rect">
             <a:avLst/>
           </a:prstGeom>
-          <a:solidFill>
-            <a:srgbClr val="FFD700"/>
-          </a:solidFill>
+          <a:solidFill>val="F0B429"/&gt;</a:solidFill>
           <a:ln>
             <a:noFill/>
           </a:ln>
@@ -5187,9 +5284,7 @@
           <a:prstGeom prst="rect">
             <a:avLst/>
           </a:prstGeom>
-          <a:solidFill>
-            <a:srgbClr val="FFD700"/>
-          </a:solidFill>
+          <a:solidFill>val="F0B429"/&gt;</a:solidFill>
           <a:ln>
             <a:noFill/>
           </a:ln>
@@ -5231,9 +5326,7 @@
           <a:prstGeom prst="rect">
             <a:avLst/>
           </a:prstGeom>
-          <a:solidFill>
-            <a:srgbClr val="146B4A"/>
-          </a:solidFill>
+          <a:solidFill>val="007A55"/&gt;</a:solidFill>
           <a:ln>
             <a:noFill/>
           </a:ln>
@@ -5286,10 +5379,8 @@
             <a:pPr algn="l"/>
             <a:r>
               <a:rPr sz="2400" b="1" i="0">
-                <a:solidFill>
-                  <a:srgbClr val="FFD700"/>
-                </a:solidFill>
-                <a:latin typeface="Calibri"/>
+                <a:solidFill>val="F0B429"/&gt;</a:solidFill>
+                <a:latin typeface="Poppins"/>
               </a:rPr>
               <a:t>6 - Security of Online Services</a:t>
             </a:r>
@@ -5310,9 +5401,7 @@
           <a:prstGeom prst="rect">
             <a:avLst/>
           </a:prstGeom>
-          <a:solidFill>
-            <a:srgbClr val="146B4A"/>
-          </a:solidFill>
+          <a:solidFill>val="007A55"/&gt;</a:solidFill>
           <a:ln>
             <a:noFill/>
           </a:ln>
@@ -5369,10 +5458,8 @@
             </a:pPr>
             <a:r>
               <a:rPr sz="1800">
-                <a:solidFill>
-                  <a:srgbClr val="FFFFFF"/>
-                </a:solidFill>
-                <a:latin typeface="Calibri"/>
+                <a:solidFill>val="FFFFFF"/&gt;</a:solidFill>
+                <a:latin typeface="Poppins"/>
               </a:rPr>
               <a:t>▪  Two-factor authentication (2FA).</a:t>
             </a:r>
@@ -5385,10 +5472,8 @@
             </a:pPr>
             <a:r>
               <a:rPr sz="1800">
-                <a:solidFill>
-                  <a:srgbClr val="FFFFFF"/>
-                </a:solidFill>
-                <a:latin typeface="Calibri"/>
+                <a:solidFill>val="FFFFFF"/&gt;</a:solidFill>
+                <a:latin typeface="Poppins"/>
               </a:rPr>
               <a:t>▪  Managing third-party app permissions.</a:t>
             </a:r>
@@ -5401,10 +5486,8 @@
             </a:pPr>
             <a:r>
               <a:rPr sz="1800">
-                <a:solidFill>
-                  <a:srgbClr val="FFFFFF"/>
-                </a:solidFill>
-                <a:latin typeface="Calibri"/>
+                <a:solidFill>val="FFFFFF"/&gt;</a:solidFill>
+                <a:latin typeface="Poppins"/>
               </a:rPr>
               <a:t>▪  Regular backups of your data.</a:t>
             </a:r>
@@ -5417,10 +5500,8 @@
             </a:pPr>
             <a:r>
               <a:rPr sz="1800">
-                <a:solidFill>
-                  <a:srgbClr val="FFFFFF"/>
-                </a:solidFill>
-                <a:latin typeface="Calibri"/>
+                <a:solidFill>val="FFFFFF"/&gt;</a:solidFill>
+                <a:latin typeface="Poppins"/>
               </a:rPr>
               <a:t>▪  GDPR / law 18-07: rights over personal data.</a:t>
             </a:r>
@@ -5451,6 +5532,47 @@
           </a:prstGeom>
         </p:spPr>
       </p:pic>
+      <p:sp>
+        <p:nvSpPr>
+          <p:cNvPr id="990001" name="Pied de page FLE"/>
+          <p:cNvSpPr>
+            <a:spLocks noGrp="1"/>
+          </p:cNvSpPr>
+          <p:nvPr/>
+        </p:nvSpPr>
+        <p:spPr>
+          <a:xfrm>
+            <a:off x="4343400" y="-329184"/>
+            <a:ext cx="4572000" cy="274320"/>
+          </a:xfrm>
+          <a:prstGeom prst="rect">
+            <a:avLst/>
+          </a:prstGeom>
+        </p:spPr>
+        <p:txBody>
+          <a:bodyPr anchor="b"/>
+          <a:lstStyle/>
+          <a:p>
+            <a:pPr algn="r">
+              <a:defRPr sz="900">
+                <a:solidFill>
+                  <a:srgbClr val="9AA7B6"/>
+                </a:solidFill>
+                <a:latin typeface="Poppins"/>
+              </a:defRPr>
+            </a:pPr>
+            <a:r>
+              <a:rPr lang="fr-FR" sz="900">
+                <a:solidFill>
+                  <a:srgbClr val="9AA7B6"/>
+                </a:solidFill>
+                <a:latin typeface="Poppins"/>
+              </a:rPr>
+              <a:t>Université de Mostaganem — Dr. Madani BELACEL</a:t>
+            </a:r>
+          </a:p>
+        </p:txBody>
+      </p:sp>
     </p:spTree>
   </p:cSld>
   <p:clrMapOvr>
@@ -5464,9 +5586,7 @@
   <p:cSld>
     <p:bg>
       <p:bgPr>
-        <a:solidFill>
-          <a:srgbClr val="0B3D2E"/>
-        </a:solidFill>
+        <a:solidFill>val="004A38"/&gt;</a:solidFill>
         <a:effectLst/>
       </p:bgPr>
     </p:bg>
@@ -5491,9 +5611,7 @@
           <a:prstGeom prst="rect">
             <a:avLst/>
           </a:prstGeom>
-          <a:solidFill>
-            <a:srgbClr val="146B4A"/>
-          </a:solidFill>
+          <a:solidFill>val="007A55"/&gt;</a:solidFill>
           <a:ln>
             <a:noFill/>
           </a:ln>
@@ -5535,9 +5653,7 @@
           <a:prstGeom prst="rect">
             <a:avLst/>
           </a:prstGeom>
-          <a:solidFill>
-            <a:srgbClr val="FFD700"/>
-          </a:solidFill>
+          <a:solidFill>val="F0B429"/&gt;</a:solidFill>
           <a:ln>
             <a:noFill/>
           </a:ln>
@@ -5579,9 +5695,7 @@
           <a:prstGeom prst="rect">
             <a:avLst/>
           </a:prstGeom>
-          <a:solidFill>
-            <a:srgbClr val="FFD700"/>
-          </a:solidFill>
+          <a:solidFill>val="F0B429"/&gt;</a:solidFill>
           <a:ln>
             <a:noFill/>
           </a:ln>
@@ -5623,9 +5737,7 @@
           <a:prstGeom prst="rect">
             <a:avLst/>
           </a:prstGeom>
-          <a:solidFill>
-            <a:srgbClr val="146B4A"/>
-          </a:solidFill>
+          <a:solidFill>val="007A55"/&gt;</a:solidFill>
           <a:ln>
             <a:noFill/>
           </a:ln>
@@ -5667,9 +5779,7 @@
           <a:prstGeom prst="rect">
             <a:avLst/>
           </a:prstGeom>
-          <a:solidFill>
-            <a:srgbClr val="146B4A"/>
-          </a:solidFill>
+          <a:solidFill>val="007A55"/&gt;</a:solidFill>
           <a:ln>
             <a:noFill/>
           </a:ln>
@@ -5722,10 +5832,8 @@
             <a:pPr algn="ctr"/>
             <a:r>
               <a:rPr sz="2200" b="1" i="0">
-                <a:solidFill>
-                  <a:srgbClr val="BBBBBB"/>
-                </a:solidFill>
-                <a:latin typeface="Calibri"/>
+                <a:solidFill>val="9AA7B6"/&gt;</a:solidFill>
+                <a:latin typeface="Poppins"/>
               </a:rPr>
               <a:t>Section 7</a:t>
             </a:r>
@@ -5757,10 +5865,8 @@
             <a:pPr algn="ctr"/>
             <a:r>
               <a:rPr sz="2800" b="1" i="0">
-                <a:solidFill>
-                  <a:srgbClr val="FFD700"/>
-                </a:solidFill>
-                <a:latin typeface="Calibri"/>
+                <a:solidFill>val="F0B429"/&gt;</a:solidFill>
+                <a:latin typeface="Poppins"/>
               </a:rPr>
               <a:t>Toward Responsible Use</a:t>
             </a:r>
@@ -5791,6 +5897,47 @@
           </a:prstGeom>
         </p:spPr>
       </p:pic>
+      <p:sp>
+        <p:nvSpPr>
+          <p:cNvPr id="990001" name="Pied de page FLE"/>
+          <p:cNvSpPr>
+            <a:spLocks noGrp="1"/>
+          </p:cNvSpPr>
+          <p:nvPr/>
+        </p:nvSpPr>
+        <p:spPr>
+          <a:xfrm>
+            <a:off x="4343400" y="-329184"/>
+            <a:ext cx="4572000" cy="274320"/>
+          </a:xfrm>
+          <a:prstGeom prst="rect">
+            <a:avLst/>
+          </a:prstGeom>
+        </p:spPr>
+        <p:txBody>
+          <a:bodyPr anchor="b"/>
+          <a:lstStyle/>
+          <a:p>
+            <a:pPr algn="r">
+              <a:defRPr sz="900">
+                <a:solidFill>
+                  <a:srgbClr val="9AA7B6"/>
+                </a:solidFill>
+                <a:latin typeface="Poppins"/>
+              </a:defRPr>
+            </a:pPr>
+            <a:r>
+              <a:rPr lang="fr-FR" sz="900">
+                <a:solidFill>
+                  <a:srgbClr val="9AA7B6"/>
+                </a:solidFill>
+                <a:latin typeface="Poppins"/>
+              </a:rPr>
+              <a:t>Université de Mostaganem — Dr. Madani BELACEL</a:t>
+            </a:r>
+          </a:p>
+        </p:txBody>
+      </p:sp>
     </p:spTree>
   </p:cSld>
   <p:clrMapOvr>
@@ -5804,9 +5951,7 @@
   <p:cSld>
     <p:bg>
       <p:bgPr>
-        <a:solidFill>
-          <a:srgbClr val="0B3D2E"/>
-        </a:solidFill>
+        <a:solidFill>val="004A38"/&gt;</a:solidFill>
         <a:effectLst/>
       </p:bgPr>
     </p:bg>
@@ -5831,9 +5976,7 @@
           <a:prstGeom prst="rect">
             <a:avLst/>
           </a:prstGeom>
-          <a:solidFill>
-            <a:srgbClr val="146B4A"/>
-          </a:solidFill>
+          <a:solidFill>val="007A55"/&gt;</a:solidFill>
           <a:ln>
             <a:noFill/>
           </a:ln>
@@ -5875,9 +6018,7 @@
           <a:prstGeom prst="rect">
             <a:avLst/>
           </a:prstGeom>
-          <a:solidFill>
-            <a:srgbClr val="FFD700"/>
-          </a:solidFill>
+          <a:solidFill>val="F0B429"/&gt;</a:solidFill>
           <a:ln>
             <a:noFill/>
           </a:ln>
@@ -5919,9 +6060,7 @@
           <a:prstGeom prst="rect">
             <a:avLst/>
           </a:prstGeom>
-          <a:solidFill>
-            <a:srgbClr val="FFD700"/>
-          </a:solidFill>
+          <a:solidFill>val="F0B429"/&gt;</a:solidFill>
           <a:ln>
             <a:noFill/>
           </a:ln>
@@ -5963,9 +6102,7 @@
           <a:prstGeom prst="rect">
             <a:avLst/>
           </a:prstGeom>
-          <a:solidFill>
-            <a:srgbClr val="146B4A"/>
-          </a:solidFill>
+          <a:solidFill>val="007A55"/&gt;</a:solidFill>
           <a:ln>
             <a:noFill/>
           </a:ln>
@@ -6018,10 +6155,8 @@
             <a:pPr algn="l"/>
             <a:r>
               <a:rPr sz="2400" b="1" i="0">
-                <a:solidFill>
-                  <a:srgbClr val="FFD700"/>
-                </a:solidFill>
-                <a:latin typeface="Calibri"/>
+                <a:solidFill>val="F0B429"/&gt;</a:solidFill>
+                <a:latin typeface="Poppins"/>
               </a:rPr>
               <a:t>7 - Toward Responsible Use</a:t>
             </a:r>
@@ -6042,9 +6177,7 @@
           <a:prstGeom prst="rect">
             <a:avLst/>
           </a:prstGeom>
-          <a:solidFill>
-            <a:srgbClr val="146B4A"/>
-          </a:solidFill>
+          <a:solidFill>val="007A55"/&gt;</a:solidFill>
           <a:ln>
             <a:noFill/>
           </a:ln>
@@ -6101,10 +6234,8 @@
             </a:pPr>
             <a:r>
               <a:rPr sz="1800">
-                <a:solidFill>
-                  <a:srgbClr val="FFFFFF"/>
-                </a:solidFill>
-                <a:latin typeface="Calibri"/>
+                <a:solidFill>val="FFFFFF"/&gt;</a:solidFill>
+                <a:latin typeface="Poppins"/>
               </a:rPr>
               <a:t>▪  Controlled screen time and digital hygiene.</a:t>
             </a:r>
@@ -6117,10 +6248,8 @@
             </a:pPr>
             <a:r>
               <a:rPr sz="1800">
-                <a:solidFill>
-                  <a:srgbClr val="FFFFFF"/>
-                </a:solidFill>
-                <a:latin typeface="Calibri"/>
+                <a:solidFill>val="FFFFFF"/&gt;</a:solidFill>
+                <a:latin typeface="Poppins"/>
               </a:rPr>
               <a:t>▪  Verify sources before sharing.</a:t>
             </a:r>
@@ -6133,10 +6262,8 @@
             </a:pPr>
             <a:r>
               <a:rPr sz="1800">
-                <a:solidFill>
-                  <a:srgbClr val="FFFFFF"/>
-                </a:solidFill>
-                <a:latin typeface="Calibri"/>
+                <a:solidFill>val="FFFFFF"/&gt;</a:solidFill>
+                <a:latin typeface="Poppins"/>
               </a:rPr>
               <a:t>▪  Respect for others: netiquette and digital citizenship.</a:t>
             </a:r>
@@ -6149,10 +6276,8 @@
             </a:pPr>
             <a:r>
               <a:rPr sz="1800">
-                <a:solidFill>
-                  <a:srgbClr val="FFFFFF"/>
-                </a:solidFill>
-                <a:latin typeface="Calibri"/>
+                <a:solidFill>val="FFFFFF"/&gt;</a:solidFill>
+                <a:latin typeface="Poppins"/>
               </a:rPr>
               <a:t>▪  Digital carbon footprint: digital sobriety.</a:t>
             </a:r>
@@ -6183,6 +6308,47 @@
           </a:prstGeom>
         </p:spPr>
       </p:pic>
+      <p:sp>
+        <p:nvSpPr>
+          <p:cNvPr id="990001" name="Pied de page FLE"/>
+          <p:cNvSpPr>
+            <a:spLocks noGrp="1"/>
+          </p:cNvSpPr>
+          <p:nvPr/>
+        </p:nvSpPr>
+        <p:spPr>
+          <a:xfrm>
+            <a:off x="4343400" y="-329184"/>
+            <a:ext cx="4572000" cy="274320"/>
+          </a:xfrm>
+          <a:prstGeom prst="rect">
+            <a:avLst/>
+          </a:prstGeom>
+        </p:spPr>
+        <p:txBody>
+          <a:bodyPr anchor="b"/>
+          <a:lstStyle/>
+          <a:p>
+            <a:pPr algn="r">
+              <a:defRPr sz="900">
+                <a:solidFill>
+                  <a:srgbClr val="9AA7B6"/>
+                </a:solidFill>
+                <a:latin typeface="Poppins"/>
+              </a:defRPr>
+            </a:pPr>
+            <a:r>
+              <a:rPr lang="fr-FR" sz="900">
+                <a:solidFill>
+                  <a:srgbClr val="9AA7B6"/>
+                </a:solidFill>
+                <a:latin typeface="Poppins"/>
+              </a:rPr>
+              <a:t>Université de Mostaganem — Dr. Madani BELACEL</a:t>
+            </a:r>
+          </a:p>
+        </p:txBody>
+      </p:sp>
     </p:spTree>
   </p:cSld>
   <p:clrMapOvr>
@@ -6196,9 +6362,7 @@
   <p:cSld>
     <p:bg>
       <p:bgPr>
-        <a:solidFill>
-          <a:srgbClr val="FF8C00"/>
-        </a:solidFill>
+        <a:solidFill>val="F0B429"/&gt;</a:solidFill>
         <a:effectLst/>
       </p:bgPr>
     </p:bg>
@@ -6223,9 +6387,7 @@
           <a:prstGeom prst="rect">
             <a:avLst/>
           </a:prstGeom>
-          <a:solidFill>
-            <a:srgbClr val="146B4A"/>
-          </a:solidFill>
+          <a:solidFill>val="007A55"/&gt;</a:solidFill>
           <a:ln>
             <a:noFill/>
           </a:ln>
@@ -6267,9 +6429,7 @@
           <a:prstGeom prst="rect">
             <a:avLst/>
           </a:prstGeom>
-          <a:solidFill>
-            <a:srgbClr val="FFD700"/>
-          </a:solidFill>
+          <a:solidFill>val="F0B429"/&gt;</a:solidFill>
           <a:ln>
             <a:noFill/>
           </a:ln>
@@ -6311,9 +6471,7 @@
           <a:prstGeom prst="rect">
             <a:avLst/>
           </a:prstGeom>
-          <a:solidFill>
-            <a:srgbClr val="FFD700"/>
-          </a:solidFill>
+          <a:solidFill>val="F0B429"/&gt;</a:solidFill>
           <a:ln>
             <a:noFill/>
           </a:ln>
@@ -6355,9 +6513,7 @@
           <a:prstGeom prst="rect">
             <a:avLst/>
           </a:prstGeom>
-          <a:solidFill>
-            <a:srgbClr val="146B4A"/>
-          </a:solidFill>
+          <a:solidFill>val="007A55"/&gt;</a:solidFill>
           <a:ln>
             <a:noFill/>
           </a:ln>
@@ -6410,10 +6566,8 @@
             <a:pPr algn="ctr"/>
             <a:r>
               <a:rPr sz="3000" b="1" i="0">
-                <a:solidFill>
-                  <a:srgbClr val="0B3D2E"/>
-                </a:solidFill>
-                <a:latin typeface="Calibri"/>
+                <a:solidFill>val="004A38"/&gt;</a:solidFill>
+                <a:latin typeface="Poppins"/>
               </a:rPr>
               <a:t>Practical Interest</a:t>
             </a:r>
@@ -6449,10 +6603,8 @@
             </a:pPr>
             <a:r>
               <a:rPr sz="1700">
-                <a:solidFill>
-                  <a:srgbClr val="0B3D2E"/>
-                </a:solidFill>
-                <a:latin typeface="Calibri"/>
+                <a:solidFill>val="004A38"/&gt;</a:solidFill>
+                <a:latin typeface="Poppins"/>
               </a:rPr>
               <a:t>▪  Use the cloud so you never lose your documents again.</a:t>
             </a:r>
@@ -6465,10 +6617,8 @@
             </a:pPr>
             <a:r>
               <a:rPr sz="1700">
-                <a:solidFill>
-                  <a:srgbClr val="0B3D2E"/>
-                </a:solidFill>
-                <a:latin typeface="Calibri"/>
+                <a:solidFill>val="004A38"/&gt;</a:solidFill>
+                <a:latin typeface="Poppins"/>
               </a:rPr>
               <a:t>▪  Collaborate remotely on student projects.</a:t>
             </a:r>
@@ -6481,10 +6631,8 @@
             </a:pPr>
             <a:r>
               <a:rPr sz="1700">
-                <a:solidFill>
-                  <a:srgbClr val="0B3D2E"/>
-                </a:solidFill>
-                <a:latin typeface="Calibri"/>
+                <a:solidFill>val="004A38"/&gt;</a:solidFill>
+                <a:latin typeface="Poppins"/>
               </a:rPr>
               <a:t>▪  Handle your administrative tasks online.</a:t>
             </a:r>
@@ -6497,10 +6645,8 @@
             </a:pPr>
             <a:r>
               <a:rPr sz="1700">
-                <a:solidFill>
-                  <a:srgbClr val="0B3D2E"/>
-                </a:solidFill>
-                <a:latin typeface="Calibri"/>
+                <a:solidFill>val="004A38"/&gt;</a:solidFill>
+                <a:latin typeface="Poppins"/>
               </a:rPr>
               <a:t>▪  Build your professional profile on LinkedIn.</a:t>
             </a:r>
@@ -6531,6 +6677,47 @@
           </a:prstGeom>
         </p:spPr>
       </p:pic>
+      <p:sp>
+        <p:nvSpPr>
+          <p:cNvPr id="990001" name="Pied de page FLE"/>
+          <p:cNvSpPr>
+            <a:spLocks noGrp="1"/>
+          </p:cNvSpPr>
+          <p:nvPr/>
+        </p:nvSpPr>
+        <p:spPr>
+          <a:xfrm>
+            <a:off x="4343400" y="-329184"/>
+            <a:ext cx="4572000" cy="274320"/>
+          </a:xfrm>
+          <a:prstGeom prst="rect">
+            <a:avLst/>
+          </a:prstGeom>
+        </p:spPr>
+        <p:txBody>
+          <a:bodyPr anchor="b"/>
+          <a:lstStyle/>
+          <a:p>
+            <a:pPr algn="r">
+              <a:defRPr sz="900">
+                <a:solidFill>
+                  <a:srgbClr val="9AA7B6"/>
+                </a:solidFill>
+                <a:latin typeface="Poppins"/>
+              </a:defRPr>
+            </a:pPr>
+            <a:r>
+              <a:rPr lang="fr-FR" sz="900">
+                <a:solidFill>
+                  <a:srgbClr val="9AA7B6"/>
+                </a:solidFill>
+                <a:latin typeface="Poppins"/>
+              </a:rPr>
+              <a:t>Université de Mostaganem — Dr. Madani BELACEL</a:t>
+            </a:r>
+          </a:p>
+        </p:txBody>
+      </p:sp>
     </p:spTree>
   </p:cSld>
   <p:clrMapOvr>
@@ -6544,9 +6731,7 @@
   <p:cSld>
     <p:bg>
       <p:bgPr>
-        <a:solidFill>
-          <a:srgbClr val="0B3D2E"/>
-        </a:solidFill>
+        <a:solidFill>val="004A38"/&gt;</a:solidFill>
         <a:effectLst/>
       </p:bgPr>
     </p:bg>
@@ -6571,9 +6756,7 @@
           <a:prstGeom prst="rect">
             <a:avLst/>
           </a:prstGeom>
-          <a:solidFill>
-            <a:srgbClr val="146B4A"/>
-          </a:solidFill>
+          <a:solidFill>val="007A55"/&gt;</a:solidFill>
           <a:ln>
             <a:noFill/>
           </a:ln>
@@ -6615,9 +6798,7 @@
           <a:prstGeom prst="rect">
             <a:avLst/>
           </a:prstGeom>
-          <a:solidFill>
-            <a:srgbClr val="FFD700"/>
-          </a:solidFill>
+          <a:solidFill>val="F0B429"/&gt;</a:solidFill>
           <a:ln>
             <a:noFill/>
           </a:ln>
@@ -6659,9 +6840,7 @@
           <a:prstGeom prst="rect">
             <a:avLst/>
           </a:prstGeom>
-          <a:solidFill>
-            <a:srgbClr val="FFD700"/>
-          </a:solidFill>
+          <a:solidFill>val="F0B429"/&gt;</a:solidFill>
           <a:ln>
             <a:noFill/>
           </a:ln>
@@ -6703,9 +6882,7 @@
           <a:prstGeom prst="rect">
             <a:avLst/>
           </a:prstGeom>
-          <a:solidFill>
-            <a:srgbClr val="146B4A"/>
-          </a:solidFill>
+          <a:solidFill>val="007A55"/&gt;</a:solidFill>
           <a:ln>
             <a:noFill/>
           </a:ln>
@@ -6758,10 +6935,8 @@
             <a:pPr algn="l"/>
             <a:r>
               <a:rPr sz="2600" b="1" i="0">
-                <a:solidFill>
-                  <a:srgbClr val="FFD700"/>
-                </a:solidFill>
-                <a:latin typeface="Calibri"/>
+                <a:solidFill>val="F0B429"/&gt;</a:solidFill>
+                <a:latin typeface="Poppins"/>
               </a:rPr>
               <a:t>Self-Assessment (MCQ)</a:t>
             </a:r>
@@ -6782,9 +6957,7 @@
           <a:prstGeom prst="rect">
             <a:avLst/>
           </a:prstGeom>
-          <a:solidFill>
-            <a:srgbClr val="146B4A"/>
-          </a:solidFill>
+          <a:solidFill>val="007A55"/&gt;</a:solidFill>
           <a:ln>
             <a:noFill/>
           </a:ln>
@@ -6841,10 +7014,8 @@
             </a:pPr>
             <a:r>
               <a:rPr sz="1500" b="1">
-                <a:solidFill>
-                  <a:srgbClr val="FFFFFF"/>
-                </a:solidFill>
-                <a:latin typeface="Calibri"/>
+                <a:solidFill>val="FFFFFF"/&gt;</a:solidFill>
+                <a:latin typeface="Poppins"/>
               </a:rPr>
               <a:t>1. What does SaaS stand for?</a:t>
             </a:r>
@@ -6857,10 +7028,8 @@
             </a:pPr>
             <a:r>
               <a:rPr sz="1400">
-                <a:solidFill>
-                  <a:srgbClr val="BBBBBB"/>
-                </a:solidFill>
-                <a:latin typeface="Calibri"/>
+                <a:solidFill>val="9AA7B6"/&gt;</a:solidFill>
+                <a:latin typeface="Poppins"/>
               </a:rPr>
               <a:t>      a) Software as a Service</a:t>
             </a:r>
@@ -6873,10 +7042,8 @@
             </a:pPr>
             <a:r>
               <a:rPr sz="1400">
-                <a:solidFill>
-                  <a:srgbClr val="BBBBBB"/>
-                </a:solidFill>
-                <a:latin typeface="Calibri"/>
+                <a:solidFill>val="9AA7B6"/&gt;</a:solidFill>
+                <a:latin typeface="Poppins"/>
               </a:rPr>
               <a:t>      b) System as an Application</a:t>
             </a:r>
@@ -6889,10 +7056,8 @@
             </a:pPr>
             <a:r>
               <a:rPr sz="1400">
-                <a:solidFill>
-                  <a:srgbClr val="BBBBBB"/>
-                </a:solidFill>
-                <a:latin typeface="Calibri"/>
+                <a:solidFill>val="9AA7B6"/&gt;</a:solidFill>
+                <a:latin typeface="Poppins"/>
               </a:rPr>
               <a:t>      c) Storage and Access Service</a:t>
             </a:r>
@@ -6905,10 +7070,8 @@
             </a:pPr>
             <a:r>
               <a:rPr sz="1500" b="1">
-                <a:solidFill>
-                  <a:srgbClr val="FFFFFF"/>
-                </a:solidFill>
-                <a:latin typeface="Calibri"/>
+                <a:solidFill>val="FFFFFF"/&gt;</a:solidFill>
+                <a:latin typeface="Poppins"/>
               </a:rPr>
               <a:t>2. 2FA is used to:</a:t>
             </a:r>
@@ -6921,10 +7084,8 @@
             </a:pPr>
             <a:r>
               <a:rPr sz="1400">
-                <a:solidFill>
-                  <a:srgbClr val="BBBBBB"/>
-                </a:solidFill>
-                <a:latin typeface="Calibri"/>
+                <a:solidFill>val="9AA7B6"/&gt;</a:solidFill>
+                <a:latin typeface="Poppins"/>
               </a:rPr>
               <a:t>      a) Speed up connection</a:t>
             </a:r>
@@ -6937,10 +7098,8 @@
             </a:pPr>
             <a:r>
               <a:rPr sz="1400">
-                <a:solidFill>
-                  <a:srgbClr val="BBBBBB"/>
-                </a:solidFill>
-                <a:latin typeface="Calibri"/>
+                <a:solidFill>val="9AA7B6"/&gt;</a:solidFill>
+                <a:latin typeface="Poppins"/>
               </a:rPr>
               <a:t>      b) Strengthen authentication</a:t>
             </a:r>
@@ -6953,10 +7112,8 @@
             </a:pPr>
             <a:r>
               <a:rPr sz="1400">
-                <a:solidFill>
-                  <a:srgbClr val="BBBBBB"/>
-                </a:solidFill>
-                <a:latin typeface="Calibri"/>
+                <a:solidFill>val="9AA7B6"/&gt;</a:solidFill>
+                <a:latin typeface="Poppins"/>
               </a:rPr>
               <a:t>      c) Compress files</a:t>
             </a:r>
@@ -6969,10 +7126,8 @@
             </a:pPr>
             <a:r>
               <a:rPr sz="1500" b="1">
-                <a:solidFill>
-                  <a:srgbClr val="FFFFFF"/>
-                </a:solidFill>
-                <a:latin typeface="Calibri"/>
+                <a:solidFill>val="FFFFFF"/&gt;</a:solidFill>
+                <a:latin typeface="Poppins"/>
               </a:rPr>
               <a:t>3. Google Drive is a:</a:t>
             </a:r>
@@ -6985,10 +7140,8 @@
             </a:pPr>
             <a:r>
               <a:rPr sz="1400">
-                <a:solidFill>
-                  <a:srgbClr val="BBBBBB"/>
-                </a:solidFill>
-                <a:latin typeface="Calibri"/>
+                <a:solidFill>val="9AA7B6"/&gt;</a:solidFill>
+                <a:latin typeface="Poppins"/>
               </a:rPr>
               <a:t>      a) Cloud storage service</a:t>
             </a:r>
@@ -7001,10 +7154,8 @@
             </a:pPr>
             <a:r>
               <a:rPr sz="1400">
-                <a:solidFill>
-                  <a:srgbClr val="BBBBBB"/>
-                </a:solidFill>
-                <a:latin typeface="Calibri"/>
+                <a:solidFill>val="9AA7B6"/&gt;</a:solidFill>
+                <a:latin typeface="Poppins"/>
               </a:rPr>
               <a:t>      b) Email-only service</a:t>
             </a:r>
@@ -7017,10 +7168,8 @@
             </a:pPr>
             <a:r>
               <a:rPr sz="1400">
-                <a:solidFill>
-                  <a:srgbClr val="BBBBBB"/>
-                </a:solidFill>
-                <a:latin typeface="Calibri"/>
+                <a:solidFill>val="9AA7B6"/&gt;</a:solidFill>
+                <a:latin typeface="Poppins"/>
               </a:rPr>
               <a:t>      c) Social network</a:t>
             </a:r>
@@ -7051,6 +7200,47 @@
           </a:prstGeom>
         </p:spPr>
       </p:pic>
+      <p:sp>
+        <p:nvSpPr>
+          <p:cNvPr id="990001" name="Pied de page FLE"/>
+          <p:cNvSpPr>
+            <a:spLocks noGrp="1"/>
+          </p:cNvSpPr>
+          <p:nvPr/>
+        </p:nvSpPr>
+        <p:spPr>
+          <a:xfrm>
+            <a:off x="4343400" y="-329184"/>
+            <a:ext cx="4572000" cy="274320"/>
+          </a:xfrm>
+          <a:prstGeom prst="rect">
+            <a:avLst/>
+          </a:prstGeom>
+        </p:spPr>
+        <p:txBody>
+          <a:bodyPr anchor="b"/>
+          <a:lstStyle/>
+          <a:p>
+            <a:pPr algn="r">
+              <a:defRPr sz="900">
+                <a:solidFill>
+                  <a:srgbClr val="9AA7B6"/>
+                </a:solidFill>
+                <a:latin typeface="Poppins"/>
+              </a:defRPr>
+            </a:pPr>
+            <a:r>
+              <a:rPr lang="fr-FR" sz="900">
+                <a:solidFill>
+                  <a:srgbClr val="9AA7B6"/>
+                </a:solidFill>
+                <a:latin typeface="Poppins"/>
+              </a:rPr>
+              <a:t>Université de Mostaganem — Dr. Madani BELACEL</a:t>
+            </a:r>
+          </a:p>
+        </p:txBody>
+      </p:sp>
     </p:spTree>
   </p:cSld>
   <p:clrMapOvr>
@@ -7064,9 +7254,7 @@
   <p:cSld>
     <p:bg>
       <p:bgPr>
-        <a:solidFill>
-          <a:srgbClr val="0B3D2E"/>
-        </a:solidFill>
+        <a:solidFill>val="004A38"/&gt;</a:solidFill>
         <a:effectLst/>
       </p:bgPr>
     </p:bg>
@@ -7091,9 +7279,7 @@
           <a:prstGeom prst="rect">
             <a:avLst/>
           </a:prstGeom>
-          <a:solidFill>
-            <a:srgbClr val="146B4A"/>
-          </a:solidFill>
+          <a:solidFill>val="007A55"/&gt;</a:solidFill>
           <a:ln>
             <a:noFill/>
           </a:ln>
@@ -7135,9 +7321,7 @@
           <a:prstGeom prst="rect">
             <a:avLst/>
           </a:prstGeom>
-          <a:solidFill>
-            <a:srgbClr val="FFD700"/>
-          </a:solidFill>
+          <a:solidFill>val="F0B429"/&gt;</a:solidFill>
           <a:ln>
             <a:noFill/>
           </a:ln>
@@ -7179,9 +7363,7 @@
           <a:prstGeom prst="rect">
             <a:avLst/>
           </a:prstGeom>
-          <a:solidFill>
-            <a:srgbClr val="FFD700"/>
-          </a:solidFill>
+          <a:solidFill>val="F0B429"/&gt;</a:solidFill>
           <a:ln>
             <a:noFill/>
           </a:ln>
@@ -7223,9 +7405,7 @@
           <a:prstGeom prst="rect">
             <a:avLst/>
           </a:prstGeom>
-          <a:solidFill>
-            <a:srgbClr val="146B4A"/>
-          </a:solidFill>
+          <a:solidFill>val="007A55"/&gt;</a:solidFill>
           <a:ln>
             <a:noFill/>
           </a:ln>
@@ -7278,10 +7458,8 @@
             <a:pPr algn="ctr"/>
             <a:r>
               <a:rPr sz="3000" b="1" i="0">
-                <a:solidFill>
-                  <a:srgbClr val="FFD700"/>
-                </a:solidFill>
-                <a:latin typeface="Calibri"/>
+                <a:solidFill>val="F0B429"/&gt;</a:solidFill>
+                <a:latin typeface="Poppins"/>
               </a:rPr>
               <a:t>Conclusion</a:t>
             </a:r>
@@ -7302,9 +7480,7 @@
           <a:prstGeom prst="rect">
             <a:avLst/>
           </a:prstGeom>
-          <a:solidFill>
-            <a:srgbClr val="146B4A"/>
-          </a:solidFill>
+          <a:solidFill>val="007A55"/&gt;</a:solidFill>
           <a:ln>
             <a:noFill/>
           </a:ln>
@@ -7361,10 +7537,8 @@
             </a:pPr>
             <a:r>
               <a:rPr sz="1800">
-                <a:solidFill>
-                  <a:srgbClr val="FFFFFF"/>
-                </a:solidFill>
-                <a:latin typeface="Calibri"/>
+                <a:solidFill>val="FFFFFF"/&gt;</a:solidFill>
+                <a:latin typeface="Poppins"/>
               </a:rPr>
               <a:t>▪  Internet services transform work, commerce and government.</a:t>
             </a:r>
@@ -7377,10 +7551,8 @@
             </a:pPr>
             <a:r>
               <a:rPr sz="1800">
-                <a:solidFill>
-                  <a:srgbClr val="FFFFFF"/>
-                </a:solidFill>
-                <a:latin typeface="Calibri"/>
+                <a:solidFill>val="FFFFFF"/&gt;</a:solidFill>
+                <a:latin typeface="Poppins"/>
               </a:rPr>
               <a:t>▪  Cloud, collaboration and e-services offer huge gains.</a:t>
             </a:r>
@@ -7393,10 +7565,8 @@
             </a:pPr>
             <a:r>
               <a:rPr sz="1800">
-                <a:solidFill>
-                  <a:srgbClr val="FFFFFF"/>
-                </a:solidFill>
-                <a:latin typeface="Calibri"/>
+                <a:solidFill>val="FFFFFF"/&gt;</a:solidFill>
+                <a:latin typeface="Poppins"/>
               </a:rPr>
               <a:t>▪  Safe and responsible use is what makes these benefits real.</a:t>
             </a:r>
@@ -7409,10 +7579,8 @@
             </a:pPr>
             <a:r>
               <a:rPr sz="1800">
-                <a:solidFill>
-                  <a:srgbClr val="FFFFFF"/>
-                </a:solidFill>
-                <a:latin typeface="Calibri"/>
+                <a:solidFill>val="FFFFFF"/&gt;</a:solidFill>
+                <a:latin typeface="Poppins"/>
               </a:rPr>
               <a:t>▪  End of the module: put every concept into practice!</a:t>
             </a:r>
@@ -7443,6 +7611,47 @@
           </a:prstGeom>
         </p:spPr>
       </p:pic>
+      <p:sp>
+        <p:nvSpPr>
+          <p:cNvPr id="990001" name="Pied de page FLE"/>
+          <p:cNvSpPr>
+            <a:spLocks noGrp="1"/>
+          </p:cNvSpPr>
+          <p:nvPr/>
+        </p:nvSpPr>
+        <p:spPr>
+          <a:xfrm>
+            <a:off x="4343400" y="-329184"/>
+            <a:ext cx="4572000" cy="274320"/>
+          </a:xfrm>
+          <a:prstGeom prst="rect">
+            <a:avLst/>
+          </a:prstGeom>
+        </p:spPr>
+        <p:txBody>
+          <a:bodyPr anchor="b"/>
+          <a:lstStyle/>
+          <a:p>
+            <a:pPr algn="r">
+              <a:defRPr sz="900">
+                <a:solidFill>
+                  <a:srgbClr val="9AA7B6"/>
+                </a:solidFill>
+                <a:latin typeface="Poppins"/>
+              </a:defRPr>
+            </a:pPr>
+            <a:r>
+              <a:rPr lang="fr-FR" sz="900">
+                <a:solidFill>
+                  <a:srgbClr val="9AA7B6"/>
+                </a:solidFill>
+                <a:latin typeface="Poppins"/>
+              </a:rPr>
+              <a:t>Université de Mostaganem — Dr. Madani BELACEL</a:t>
+            </a:r>
+          </a:p>
+        </p:txBody>
+      </p:sp>
     </p:spTree>
   </p:cSld>
   <p:clrMapOvr>
@@ -7456,9 +7665,7 @@
   <p:cSld>
     <p:bg>
       <p:bgPr>
-        <a:solidFill>
-          <a:srgbClr val="0B3D2E"/>
-        </a:solidFill>
+        <a:solidFill>val="004A38"/&gt;</a:solidFill>
         <a:effectLst/>
       </p:bgPr>
     </p:bg>
@@ -7483,9 +7690,7 @@
           <a:prstGeom prst="rect">
             <a:avLst/>
           </a:prstGeom>
-          <a:solidFill>
-            <a:srgbClr val="146B4A"/>
-          </a:solidFill>
+          <a:solidFill>val="007A55"/&gt;</a:solidFill>
           <a:ln>
             <a:noFill/>
           </a:ln>
@@ -7527,9 +7732,7 @@
           <a:prstGeom prst="rect">
             <a:avLst/>
           </a:prstGeom>
-          <a:solidFill>
-            <a:srgbClr val="FFD700"/>
-          </a:solidFill>
+          <a:solidFill>val="F0B429"/&gt;</a:solidFill>
           <a:ln>
             <a:noFill/>
           </a:ln>
@@ -7571,9 +7774,7 @@
           <a:prstGeom prst="rect">
             <a:avLst/>
           </a:prstGeom>
-          <a:solidFill>
-            <a:srgbClr val="FFD700"/>
-          </a:solidFill>
+          <a:solidFill>val="F0B429"/&gt;</a:solidFill>
           <a:ln>
             <a:noFill/>
           </a:ln>
@@ -7615,9 +7816,7 @@
           <a:prstGeom prst="rect">
             <a:avLst/>
           </a:prstGeom>
-          <a:solidFill>
-            <a:srgbClr val="146B4A"/>
-          </a:solidFill>
+          <a:solidFill>val="007A55"/&gt;</a:solidFill>
           <a:ln>
             <a:noFill/>
           </a:ln>
@@ -7670,10 +7869,8 @@
             <a:pPr algn="ctr"/>
             <a:r>
               <a:rPr sz="3200" b="1" i="0">
-                <a:solidFill>
-                  <a:srgbClr val="FFD700"/>
-                </a:solidFill>
-                <a:latin typeface="Calibri"/>
+                <a:solidFill>val="F0B429"/&gt;</a:solidFill>
+                <a:latin typeface="Poppins"/>
               </a:rPr>
               <a:t>Course Outline</a:t>
             </a:r>
@@ -7709,10 +7906,8 @@
             </a:pPr>
             <a:r>
               <a:rPr sz="1900">
-                <a:solidFill>
-                  <a:srgbClr val="FFFFFF"/>
-                </a:solidFill>
-                <a:latin typeface="Calibri"/>
+                <a:solidFill>val="FFFFFF"/&gt;</a:solidFill>
+                <a:latin typeface="Poppins"/>
               </a:rPr>
               <a:t>▪  1. Service Overview</a:t>
             </a:r>
@@ -7725,10 +7920,8 @@
             </a:pPr>
             <a:r>
               <a:rPr sz="1900">
-                <a:solidFill>
-                  <a:srgbClr val="FFFFFF"/>
-                </a:solidFill>
-                <a:latin typeface="Calibri"/>
+                <a:solidFill>val="FFFFFF"/&gt;</a:solidFill>
+                <a:latin typeface="Poppins"/>
               </a:rPr>
               <a:t>▪  2. Cloud Computing</a:t>
             </a:r>
@@ -7741,10 +7934,8 @@
             </a:pPr>
             <a:r>
               <a:rPr sz="1900">
-                <a:solidFill>
-                  <a:srgbClr val="FFFFFF"/>
-                </a:solidFill>
-                <a:latin typeface="Calibri"/>
+                <a:solidFill>val="FFFFFF"/&gt;</a:solidFill>
+                <a:latin typeface="Poppins"/>
               </a:rPr>
               <a:t>▪  3. Collaborative Work</a:t>
             </a:r>
@@ -7757,10 +7948,8 @@
             </a:pPr>
             <a:r>
               <a:rPr sz="1900">
-                <a:solidFill>
-                  <a:srgbClr val="FFFFFF"/>
-                </a:solidFill>
-                <a:latin typeface="Calibri"/>
+                <a:solidFill>val="FFFFFF"/&gt;</a:solidFill>
+                <a:latin typeface="Poppins"/>
               </a:rPr>
               <a:t>▪  4. E-commerce and Online Services</a:t>
             </a:r>
@@ -7773,10 +7962,8 @@
             </a:pPr>
             <a:r>
               <a:rPr sz="1900">
-                <a:solidFill>
-                  <a:srgbClr val="FFFFFF"/>
-                </a:solidFill>
-                <a:latin typeface="Calibri"/>
+                <a:solidFill>val="FFFFFF"/&gt;</a:solidFill>
+                <a:latin typeface="Poppins"/>
               </a:rPr>
               <a:t>▪  5. Social Media</a:t>
             </a:r>
@@ -7789,10 +7976,8 @@
             </a:pPr>
             <a:r>
               <a:rPr sz="1900">
-                <a:solidFill>
-                  <a:srgbClr val="FFFFFF"/>
-                </a:solidFill>
-                <a:latin typeface="Calibri"/>
+                <a:solidFill>val="FFFFFF"/&gt;</a:solidFill>
+                <a:latin typeface="Poppins"/>
               </a:rPr>
               <a:t>▪  6. Security of Online Services</a:t>
             </a:r>
@@ -7805,12 +7990,51 @@
             </a:pPr>
             <a:r>
               <a:rPr sz="1900">
-                <a:solidFill>
-                  <a:srgbClr val="FFFFFF"/>
-                </a:solidFill>
-                <a:latin typeface="Calibri"/>
+                <a:solidFill>val="FFFFFF"/&gt;</a:solidFill>
+                <a:latin typeface="Poppins"/>
               </a:rPr>
               <a:t>▪  7. Toward Responsible Use</a:t>
+            </a:r>
+          </a:p>
+        </p:txBody>
+      </p:sp>
+      <p:sp>
+        <p:nvSpPr>
+          <p:cNvPr id="990001" name="Pied de page FLE"/>
+          <p:cNvSpPr>
+            <a:spLocks noGrp="1"/>
+          </p:cNvSpPr>
+          <p:nvPr/>
+        </p:nvSpPr>
+        <p:spPr>
+          <a:xfrm>
+            <a:off x="4343400" y="-329184"/>
+            <a:ext cx="4572000" cy="274320"/>
+          </a:xfrm>
+          <a:prstGeom prst="rect">
+            <a:avLst/>
+          </a:prstGeom>
+        </p:spPr>
+        <p:txBody>
+          <a:bodyPr anchor="b"/>
+          <a:lstStyle/>
+          <a:p>
+            <a:pPr algn="r">
+              <a:defRPr sz="900">
+                <a:solidFill>
+                  <a:srgbClr val="9AA7B6"/>
+                </a:solidFill>
+                <a:latin typeface="Poppins"/>
+              </a:defRPr>
+            </a:pPr>
+            <a:r>
+              <a:rPr lang="fr-FR" sz="900">
+                <a:solidFill>
+                  <a:srgbClr val="9AA7B6"/>
+                </a:solidFill>
+                <a:latin typeface="Poppins"/>
+              </a:rPr>
+              <a:t>Université de Mostaganem — Dr. Madani BELACEL</a:t>
             </a:r>
           </a:p>
         </p:txBody>
@@ -7828,9 +8052,7 @@
   <p:cSld>
     <p:bg>
       <p:bgPr>
-        <a:solidFill>
-          <a:srgbClr val="0B3D2E"/>
-        </a:solidFill>
+        <a:solidFill>val="004A38"/&gt;</a:solidFill>
         <a:effectLst/>
       </p:bgPr>
     </p:bg>
@@ -7855,9 +8077,7 @@
           <a:prstGeom prst="rect">
             <a:avLst/>
           </a:prstGeom>
-          <a:solidFill>
-            <a:srgbClr val="146B4A"/>
-          </a:solidFill>
+          <a:solidFill>val="007A55"/&gt;</a:solidFill>
           <a:ln>
             <a:noFill/>
           </a:ln>
@@ -7899,9 +8119,7 @@
           <a:prstGeom prst="rect">
             <a:avLst/>
           </a:prstGeom>
-          <a:solidFill>
-            <a:srgbClr val="FFD700"/>
-          </a:solidFill>
+          <a:solidFill>val="F0B429"/&gt;</a:solidFill>
           <a:ln>
             <a:noFill/>
           </a:ln>
@@ -7943,9 +8161,7 @@
           <a:prstGeom prst="rect">
             <a:avLst/>
           </a:prstGeom>
-          <a:solidFill>
-            <a:srgbClr val="FFD700"/>
-          </a:solidFill>
+          <a:solidFill>val="F0B429"/&gt;</a:solidFill>
           <a:ln>
             <a:noFill/>
           </a:ln>
@@ -7987,9 +8203,7 @@
           <a:prstGeom prst="rect">
             <a:avLst/>
           </a:prstGeom>
-          <a:solidFill>
-            <a:srgbClr val="146B4A"/>
-          </a:solidFill>
+          <a:solidFill>val="007A55"/&gt;</a:solidFill>
           <a:ln>
             <a:noFill/>
           </a:ln>
@@ -8042,10 +8256,8 @@
             <a:pPr algn="l"/>
             <a:r>
               <a:rPr sz="3000" b="1" i="0">
-                <a:solidFill>
-                  <a:srgbClr val="FFD700"/>
-                </a:solidFill>
-                <a:latin typeface="Calibri"/>
+                <a:solidFill>val="F0B429"/&gt;</a:solidFill>
+                <a:latin typeface="Poppins"/>
               </a:rPr>
               <a:t>References</a:t>
             </a:r>
@@ -8066,9 +8278,7 @@
           <a:prstGeom prst="rect">
             <a:avLst/>
           </a:prstGeom>
-          <a:solidFill>
-            <a:srgbClr val="146B4A"/>
-          </a:solidFill>
+          <a:solidFill>val="007A55"/&gt;</a:solidFill>
           <a:ln>
             <a:noFill/>
           </a:ln>
@@ -8125,10 +8335,8 @@
             </a:pPr>
             <a:r>
               <a:rPr sz="1500">
-                <a:solidFill>
-                  <a:srgbClr val="BBBBBB"/>
-                </a:solidFill>
-                <a:latin typeface="Calibri"/>
+                <a:solidFill>val="9AA7B6"/&gt;</a:solidFill>
+                <a:latin typeface="Poppins"/>
               </a:rPr>
               <a:t>- Microsoft Support - OneDrive and Office 365.</a:t>
             </a:r>
@@ -8141,10 +8349,8 @@
             </a:pPr>
             <a:r>
               <a:rPr sz="1500">
-                <a:solidFill>
-                  <a:srgbClr val="BBBBBB"/>
-                </a:solidFill>
-                <a:latin typeface="Calibri"/>
+                <a:solidFill>val="9AA7B6"/&gt;</a:solidFill>
+                <a:latin typeface="Poppins"/>
               </a:rPr>
               <a:t>- GDPR - data protection guidelines.</a:t>
             </a:r>
@@ -8157,10 +8363,8 @@
             </a:pPr>
             <a:r>
               <a:rPr sz="1500">
-                <a:solidFill>
-                  <a:srgbClr val="BBBBBB"/>
-                </a:solidFill>
-                <a:latin typeface="Calibri"/>
+                <a:solidFill>val="9AA7B6"/&gt;</a:solidFill>
+                <a:latin typeface="Poppins"/>
               </a:rPr>
               <a:t>- Algerian Law 18-07 on personal data protection.</a:t>
             </a:r>
@@ -8173,10 +8377,8 @@
             </a:pPr>
             <a:r>
               <a:rPr sz="1500">
-                <a:solidFill>
-                  <a:srgbClr val="BBBBBB"/>
-                </a:solidFill>
-                <a:latin typeface="Calibri"/>
+                <a:solidFill>val="9AA7B6"/&gt;</a:solidFill>
+                <a:latin typeface="Poppins"/>
               </a:rPr>
               <a:t>- ICT Course materials, University of Mostaganem.</a:t>
             </a:r>
@@ -8207,6 +8409,47 @@
           </a:prstGeom>
         </p:spPr>
       </p:pic>
+      <p:sp>
+        <p:nvSpPr>
+          <p:cNvPr id="990001" name="Pied de page FLE"/>
+          <p:cNvSpPr>
+            <a:spLocks noGrp="1"/>
+          </p:cNvSpPr>
+          <p:nvPr/>
+        </p:nvSpPr>
+        <p:spPr>
+          <a:xfrm>
+            <a:off x="4343400" y="-329184"/>
+            <a:ext cx="4572000" cy="274320"/>
+          </a:xfrm>
+          <a:prstGeom prst="rect">
+            <a:avLst/>
+          </a:prstGeom>
+        </p:spPr>
+        <p:txBody>
+          <a:bodyPr anchor="b"/>
+          <a:lstStyle/>
+          <a:p>
+            <a:pPr algn="r">
+              <a:defRPr sz="900">
+                <a:solidFill>
+                  <a:srgbClr val="9AA7B6"/>
+                </a:solidFill>
+                <a:latin typeface="Poppins"/>
+              </a:defRPr>
+            </a:pPr>
+            <a:r>
+              <a:rPr lang="fr-FR" sz="900">
+                <a:solidFill>
+                  <a:srgbClr val="9AA7B6"/>
+                </a:solidFill>
+                <a:latin typeface="Poppins"/>
+              </a:rPr>
+              <a:t>Université de Mostaganem — Dr. Madani BELACEL</a:t>
+            </a:r>
+          </a:p>
+        </p:txBody>
+      </p:sp>
     </p:spTree>
   </p:cSld>
   <p:clrMapOvr>
@@ -8220,9 +8463,7 @@
   <p:cSld>
     <p:bg>
       <p:bgPr>
-        <a:solidFill>
-          <a:srgbClr val="0B3D2E"/>
-        </a:solidFill>
+        <a:solidFill>val="004A38"/&gt;</a:solidFill>
         <a:effectLst/>
       </p:bgPr>
     </p:bg>
@@ -8247,9 +8488,7 @@
           <a:prstGeom prst="rect">
             <a:avLst/>
           </a:prstGeom>
-          <a:solidFill>
-            <a:srgbClr val="146B4A"/>
-          </a:solidFill>
+          <a:solidFill>val="007A55"/&gt;</a:solidFill>
           <a:ln>
             <a:noFill/>
           </a:ln>
@@ -8291,9 +8530,7 @@
           <a:prstGeom prst="rect">
             <a:avLst/>
           </a:prstGeom>
-          <a:solidFill>
-            <a:srgbClr val="FFD700"/>
-          </a:solidFill>
+          <a:solidFill>val="F0B429"/&gt;</a:solidFill>
           <a:ln>
             <a:noFill/>
           </a:ln>
@@ -8335,9 +8572,7 @@
           <a:prstGeom prst="rect">
             <a:avLst/>
           </a:prstGeom>
-          <a:solidFill>
-            <a:srgbClr val="FFD700"/>
-          </a:solidFill>
+          <a:solidFill>val="F0B429"/&gt;</a:solidFill>
           <a:ln>
             <a:noFill/>
           </a:ln>
@@ -8379,9 +8614,7 @@
           <a:prstGeom prst="rect">
             <a:avLst/>
           </a:prstGeom>
-          <a:solidFill>
-            <a:srgbClr val="146B4A"/>
-          </a:solidFill>
+          <a:solidFill>val="007A55"/&gt;</a:solidFill>
           <a:ln>
             <a:noFill/>
           </a:ln>
@@ -8423,9 +8656,7 @@
           <a:prstGeom prst="rect">
             <a:avLst/>
           </a:prstGeom>
-          <a:solidFill>
-            <a:srgbClr val="FFD700"/>
-          </a:solidFill>
+          <a:solidFill>val="F0B429"/&gt;</a:solidFill>
           <a:ln>
             <a:noFill/>
           </a:ln>
@@ -8478,10 +8709,8 @@
             <a:pPr algn="ctr"/>
             <a:r>
               <a:rPr sz="3800" b="1" i="0">
-                <a:solidFill>
-                  <a:srgbClr val="FFD700"/>
-                </a:solidFill>
-                <a:latin typeface="Calibri"/>
+                <a:solidFill>val="F0B429"/&gt;</a:solidFill>
+                <a:latin typeface="Poppins"/>
               </a:rPr>
               <a:t>Thank you for your attention!</a:t>
             </a:r>
@@ -8513,10 +8742,8 @@
             <a:pPr algn="ctr"/>
             <a:r>
               <a:rPr sz="2600" b="0" i="0">
-                <a:solidFill>
-                  <a:srgbClr val="FFFFFF"/>
-                </a:solidFill>
-                <a:latin typeface="Calibri"/>
+                <a:solidFill>val="FFFFFF"/&gt;</a:solidFill>
+                <a:latin typeface="Poppins"/>
               </a:rPr>
               <a:t>Questions?</a:t>
             </a:r>
@@ -8548,10 +8775,8 @@
             <a:pPr algn="ctr"/>
             <a:r>
               <a:rPr sz="1600" b="0" i="0">
-                <a:solidFill>
-                  <a:srgbClr val="BBBBBB"/>
-                </a:solidFill>
-                <a:latin typeface="Calibri"/>
+                <a:solidFill>val="9AA7B6"/&gt;</a:solidFill>
+                <a:latin typeface="Poppins"/>
               </a:rPr>
               <a:t>Dr. BELACEL Madani</a:t>
             </a:r>
@@ -8582,6 +8807,47 @@
           </a:prstGeom>
         </p:spPr>
       </p:pic>
+      <p:sp>
+        <p:nvSpPr>
+          <p:cNvPr id="990001" name="Pied de page FLE"/>
+          <p:cNvSpPr>
+            <a:spLocks noGrp="1"/>
+          </p:cNvSpPr>
+          <p:nvPr/>
+        </p:nvSpPr>
+        <p:spPr>
+          <a:xfrm>
+            <a:off x="4343400" y="-329184"/>
+            <a:ext cx="4572000" cy="274320"/>
+          </a:xfrm>
+          <a:prstGeom prst="rect">
+            <a:avLst/>
+          </a:prstGeom>
+        </p:spPr>
+        <p:txBody>
+          <a:bodyPr anchor="b"/>
+          <a:lstStyle/>
+          <a:p>
+            <a:pPr algn="r">
+              <a:defRPr sz="900">
+                <a:solidFill>
+                  <a:srgbClr val="9AA7B6"/>
+                </a:solidFill>
+                <a:latin typeface="Poppins"/>
+              </a:defRPr>
+            </a:pPr>
+            <a:r>
+              <a:rPr lang="fr-FR" sz="900">
+                <a:solidFill>
+                  <a:srgbClr val="9AA7B6"/>
+                </a:solidFill>
+                <a:latin typeface="Poppins"/>
+              </a:rPr>
+              <a:t>Université de Mostaganem — Dr. Madani BELACEL</a:t>
+            </a:r>
+          </a:p>
+        </p:txBody>
+      </p:sp>
     </p:spTree>
   </p:cSld>
   <p:clrMapOvr>
@@ -8595,9 +8861,7 @@
   <p:cSld>
     <p:bg>
       <p:bgPr>
-        <a:solidFill>
-          <a:srgbClr val="0B3D2E"/>
-        </a:solidFill>
+        <a:solidFill>val="004A38"/&gt;</a:solidFill>
         <a:effectLst/>
       </p:bgPr>
     </p:bg>
@@ -8622,9 +8886,7 @@
           <a:prstGeom prst="rect">
             <a:avLst/>
           </a:prstGeom>
-          <a:solidFill>
-            <a:srgbClr val="146B4A"/>
-          </a:solidFill>
+          <a:solidFill>val="007A55"/&gt;</a:solidFill>
           <a:ln>
             <a:noFill/>
           </a:ln>
@@ -8666,9 +8928,7 @@
           <a:prstGeom prst="rect">
             <a:avLst/>
           </a:prstGeom>
-          <a:solidFill>
-            <a:srgbClr val="FFD700"/>
-          </a:solidFill>
+          <a:solidFill>val="F0B429"/&gt;</a:solidFill>
           <a:ln>
             <a:noFill/>
           </a:ln>
@@ -8710,9 +8970,7 @@
           <a:prstGeom prst="rect">
             <a:avLst/>
           </a:prstGeom>
-          <a:solidFill>
-            <a:srgbClr val="FFD700"/>
-          </a:solidFill>
+          <a:solidFill>val="F0B429"/&gt;</a:solidFill>
           <a:ln>
             <a:noFill/>
           </a:ln>
@@ -8754,9 +9012,7 @@
           <a:prstGeom prst="rect">
             <a:avLst/>
           </a:prstGeom>
-          <a:solidFill>
-            <a:srgbClr val="146B4A"/>
-          </a:solidFill>
+          <a:solidFill>val="007A55"/&gt;</a:solidFill>
           <a:ln>
             <a:noFill/>
           </a:ln>
@@ -8798,9 +9054,7 @@
           <a:prstGeom prst="rect">
             <a:avLst/>
           </a:prstGeom>
-          <a:solidFill>
-            <a:srgbClr val="146B4A"/>
-          </a:solidFill>
+          <a:solidFill>val="007A55"/&gt;</a:solidFill>
           <a:ln>
             <a:noFill/>
           </a:ln>
@@ -8853,10 +9107,8 @@
             <a:pPr algn="ctr"/>
             <a:r>
               <a:rPr sz="2200" b="1" i="0">
-                <a:solidFill>
-                  <a:srgbClr val="BBBBBB"/>
-                </a:solidFill>
-                <a:latin typeface="Calibri"/>
+                <a:solidFill>val="9AA7B6"/&gt;</a:solidFill>
+                <a:latin typeface="Poppins"/>
               </a:rPr>
               <a:t>Section 1</a:t>
             </a:r>
@@ -8888,10 +9140,8 @@
             <a:pPr algn="ctr"/>
             <a:r>
               <a:rPr sz="2800" b="1" i="0">
-                <a:solidFill>
-                  <a:srgbClr val="FFD700"/>
-                </a:solidFill>
-                <a:latin typeface="Calibri"/>
+                <a:solidFill>val="F0B429"/&gt;</a:solidFill>
+                <a:latin typeface="Poppins"/>
               </a:rPr>
               <a:t>Service Overview</a:t>
             </a:r>
@@ -8922,6 +9172,47 @@
           </a:prstGeom>
         </p:spPr>
       </p:pic>
+      <p:sp>
+        <p:nvSpPr>
+          <p:cNvPr id="990001" name="Pied de page FLE"/>
+          <p:cNvSpPr>
+            <a:spLocks noGrp="1"/>
+          </p:cNvSpPr>
+          <p:nvPr/>
+        </p:nvSpPr>
+        <p:spPr>
+          <a:xfrm>
+            <a:off x="4343400" y="-329184"/>
+            <a:ext cx="4572000" cy="274320"/>
+          </a:xfrm>
+          <a:prstGeom prst="rect">
+            <a:avLst/>
+          </a:prstGeom>
+        </p:spPr>
+        <p:txBody>
+          <a:bodyPr anchor="b"/>
+          <a:lstStyle/>
+          <a:p>
+            <a:pPr algn="r">
+              <a:defRPr sz="900">
+                <a:solidFill>
+                  <a:srgbClr val="9AA7B6"/>
+                </a:solidFill>
+                <a:latin typeface="Poppins"/>
+              </a:defRPr>
+            </a:pPr>
+            <a:r>
+              <a:rPr lang="fr-FR" sz="900">
+                <a:solidFill>
+                  <a:srgbClr val="9AA7B6"/>
+                </a:solidFill>
+                <a:latin typeface="Poppins"/>
+              </a:rPr>
+              <a:t>Université de Mostaganem — Dr. Madani BELACEL</a:t>
+            </a:r>
+          </a:p>
+        </p:txBody>
+      </p:sp>
     </p:spTree>
   </p:cSld>
   <p:clrMapOvr>
@@ -8935,9 +9226,7 @@
   <p:cSld>
     <p:bg>
       <p:bgPr>
-        <a:solidFill>
-          <a:srgbClr val="0B3D2E"/>
-        </a:solidFill>
+        <a:solidFill>val="004A38"/&gt;</a:solidFill>
         <a:effectLst/>
       </p:bgPr>
     </p:bg>
@@ -8962,9 +9251,7 @@
           <a:prstGeom prst="rect">
             <a:avLst/>
           </a:prstGeom>
-          <a:solidFill>
-            <a:srgbClr val="146B4A"/>
-          </a:solidFill>
+          <a:solidFill>val="007A55"/&gt;</a:solidFill>
           <a:ln>
             <a:noFill/>
           </a:ln>
@@ -9006,9 +9293,7 @@
           <a:prstGeom prst="rect">
             <a:avLst/>
           </a:prstGeom>
-          <a:solidFill>
-            <a:srgbClr val="FFD700"/>
-          </a:solidFill>
+          <a:solidFill>val="F0B429"/&gt;</a:solidFill>
           <a:ln>
             <a:noFill/>
           </a:ln>
@@ -9050,9 +9335,7 @@
           <a:prstGeom prst="rect">
             <a:avLst/>
           </a:prstGeom>
-          <a:solidFill>
-            <a:srgbClr val="FFD700"/>
-          </a:solidFill>
+          <a:solidFill>val="F0B429"/&gt;</a:solidFill>
           <a:ln>
             <a:noFill/>
           </a:ln>
@@ -9094,9 +9377,7 @@
           <a:prstGeom prst="rect">
             <a:avLst/>
           </a:prstGeom>
-          <a:solidFill>
-            <a:srgbClr val="146B4A"/>
-          </a:solidFill>
+          <a:solidFill>val="007A55"/&gt;</a:solidFill>
           <a:ln>
             <a:noFill/>
           </a:ln>
@@ -9149,10 +9430,8 @@
             <a:pPr algn="l"/>
             <a:r>
               <a:rPr sz="2400" b="1" i="0">
-                <a:solidFill>
-                  <a:srgbClr val="FFD700"/>
-                </a:solidFill>
-                <a:latin typeface="Calibri"/>
+                <a:solidFill>val="F0B429"/&gt;</a:solidFill>
+                <a:latin typeface="Poppins"/>
               </a:rPr>
               <a:t>1 - Service Overview</a:t>
             </a:r>
@@ -9173,9 +9452,7 @@
           <a:prstGeom prst="rect">
             <a:avLst/>
           </a:prstGeom>
-          <a:solidFill>
-            <a:srgbClr val="146B4A"/>
-          </a:solidFill>
+          <a:solidFill>val="007A55"/&gt;</a:solidFill>
           <a:ln>
             <a:noFill/>
           </a:ln>
@@ -9232,10 +9509,8 @@
             </a:pPr>
             <a:r>
               <a:rPr sz="1800">
-                <a:solidFill>
-                  <a:srgbClr val="FFFFFF"/>
-                </a:solidFill>
-                <a:latin typeface="Calibri"/>
+                <a:solidFill>val="FFFFFF"/&gt;</a:solidFill>
+                <a:latin typeface="Poppins"/>
               </a:rPr>
               <a:t>▪  The Web: browsing pages and websites.</a:t>
             </a:r>
@@ -9248,10 +9523,8 @@
             </a:pPr>
             <a:r>
               <a:rPr sz="1800">
-                <a:solidFill>
-                  <a:srgbClr val="FFFFFF"/>
-                </a:solidFill>
-                <a:latin typeface="Calibri"/>
+                <a:solidFill>val="FFFFFF"/&gt;</a:solidFill>
+                <a:latin typeface="Poppins"/>
               </a:rPr>
               <a:t>▪  Email: asynchronous communication.</a:t>
             </a:r>
@@ -9264,10 +9537,8 @@
             </a:pPr>
             <a:r>
               <a:rPr sz="1800">
-                <a:solidFill>
-                  <a:srgbClr val="FFFFFF"/>
-                </a:solidFill>
-                <a:latin typeface="Calibri"/>
+                <a:solidFill>val="FFFFFF"/&gt;</a:solidFill>
+                <a:latin typeface="Poppins"/>
               </a:rPr>
               <a:t>▪  File transfer: FTP, cloud storage.</a:t>
             </a:r>
@@ -9280,10 +9551,8 @@
             </a:pPr>
             <a:r>
               <a:rPr sz="1800">
-                <a:solidFill>
-                  <a:srgbClr val="FFFFFF"/>
-                </a:solidFill>
-                <a:latin typeface="Calibri"/>
+                <a:solidFill>val="FFFFFF"/&gt;</a:solidFill>
+                <a:latin typeface="Poppins"/>
               </a:rPr>
               <a:t>▪  Instant messaging and video conferencing.</a:t>
             </a:r>
@@ -9296,10 +9565,8 @@
             </a:pPr>
             <a:r>
               <a:rPr sz="1800">
-                <a:solidFill>
-                  <a:srgbClr val="FFFFFF"/>
-                </a:solidFill>
-                <a:latin typeface="Calibri"/>
+                <a:solidFill>val="FFFFFF"/&gt;</a:solidFill>
+                <a:latin typeface="Poppins"/>
               </a:rPr>
               <a:t>▪  Streaming, e-commerce, e-government, e-learning.</a:t>
             </a:r>
@@ -9330,6 +9597,47 @@
           </a:prstGeom>
         </p:spPr>
       </p:pic>
+      <p:sp>
+        <p:nvSpPr>
+          <p:cNvPr id="990001" name="Pied de page FLE"/>
+          <p:cNvSpPr>
+            <a:spLocks noGrp="1"/>
+          </p:cNvSpPr>
+          <p:nvPr/>
+        </p:nvSpPr>
+        <p:spPr>
+          <a:xfrm>
+            <a:off x="4343400" y="-329184"/>
+            <a:ext cx="4572000" cy="274320"/>
+          </a:xfrm>
+          <a:prstGeom prst="rect">
+            <a:avLst/>
+          </a:prstGeom>
+        </p:spPr>
+        <p:txBody>
+          <a:bodyPr anchor="b"/>
+          <a:lstStyle/>
+          <a:p>
+            <a:pPr algn="r">
+              <a:defRPr sz="900">
+                <a:solidFill>
+                  <a:srgbClr val="9AA7B6"/>
+                </a:solidFill>
+                <a:latin typeface="Poppins"/>
+              </a:defRPr>
+            </a:pPr>
+            <a:r>
+              <a:rPr lang="fr-FR" sz="900">
+                <a:solidFill>
+                  <a:srgbClr val="9AA7B6"/>
+                </a:solidFill>
+                <a:latin typeface="Poppins"/>
+              </a:rPr>
+              <a:t>Université de Mostaganem — Dr. Madani BELACEL</a:t>
+            </a:r>
+          </a:p>
+        </p:txBody>
+      </p:sp>
     </p:spTree>
   </p:cSld>
   <p:clrMapOvr>
@@ -9343,9 +9651,7 @@
   <p:cSld>
     <p:bg>
       <p:bgPr>
-        <a:solidFill>
-          <a:srgbClr val="0B3D2E"/>
-        </a:solidFill>
+        <a:solidFill>val="004A38"/&gt;</a:solidFill>
         <a:effectLst/>
       </p:bgPr>
     </p:bg>
@@ -9370,9 +9676,7 @@
           <a:prstGeom prst="rect">
             <a:avLst/>
           </a:prstGeom>
-          <a:solidFill>
-            <a:srgbClr val="146B4A"/>
-          </a:solidFill>
+          <a:solidFill>val="007A55"/&gt;</a:solidFill>
           <a:ln>
             <a:noFill/>
           </a:ln>
@@ -9414,9 +9718,7 @@
           <a:prstGeom prst="rect">
             <a:avLst/>
           </a:prstGeom>
-          <a:solidFill>
-            <a:srgbClr val="FFD700"/>
-          </a:solidFill>
+          <a:solidFill>val="F0B429"/&gt;</a:solidFill>
           <a:ln>
             <a:noFill/>
           </a:ln>
@@ -9458,9 +9760,7 @@
           <a:prstGeom prst="rect">
             <a:avLst/>
           </a:prstGeom>
-          <a:solidFill>
-            <a:srgbClr val="FFD700"/>
-          </a:solidFill>
+          <a:solidFill>val="F0B429"/&gt;</a:solidFill>
           <a:ln>
             <a:noFill/>
           </a:ln>
@@ -9502,9 +9802,7 @@
           <a:prstGeom prst="rect">
             <a:avLst/>
           </a:prstGeom>
-          <a:solidFill>
-            <a:srgbClr val="146B4A"/>
-          </a:solidFill>
+          <a:solidFill>val="007A55"/&gt;</a:solidFill>
           <a:ln>
             <a:noFill/>
           </a:ln>
@@ -9546,9 +9844,7 @@
           <a:prstGeom prst="rect">
             <a:avLst/>
           </a:prstGeom>
-          <a:solidFill>
-            <a:srgbClr val="146B4A"/>
-          </a:solidFill>
+          <a:solidFill>val="007A55"/&gt;</a:solidFill>
           <a:ln>
             <a:noFill/>
           </a:ln>
@@ -9601,10 +9897,8 @@
             <a:pPr algn="ctr"/>
             <a:r>
               <a:rPr sz="2200" b="1" i="0">
-                <a:solidFill>
-                  <a:srgbClr val="BBBBBB"/>
-                </a:solidFill>
-                <a:latin typeface="Calibri"/>
+                <a:solidFill>val="9AA7B6"/&gt;</a:solidFill>
+                <a:latin typeface="Poppins"/>
               </a:rPr>
               <a:t>Section 2</a:t>
             </a:r>
@@ -9636,10 +9930,8 @@
             <a:pPr algn="ctr"/>
             <a:r>
               <a:rPr sz="2800" b="1" i="0">
-                <a:solidFill>
-                  <a:srgbClr val="FFD700"/>
-                </a:solidFill>
-                <a:latin typeface="Calibri"/>
+                <a:solidFill>val="F0B429"/&gt;</a:solidFill>
+                <a:latin typeface="Poppins"/>
               </a:rPr>
               <a:t>Cloud Computing</a:t>
             </a:r>
@@ -9670,6 +9962,47 @@
           </a:prstGeom>
         </p:spPr>
       </p:pic>
+      <p:sp>
+        <p:nvSpPr>
+          <p:cNvPr id="990001" name="Pied de page FLE"/>
+          <p:cNvSpPr>
+            <a:spLocks noGrp="1"/>
+          </p:cNvSpPr>
+          <p:nvPr/>
+        </p:nvSpPr>
+        <p:spPr>
+          <a:xfrm>
+            <a:off x="4343400" y="-329184"/>
+            <a:ext cx="4572000" cy="274320"/>
+          </a:xfrm>
+          <a:prstGeom prst="rect">
+            <a:avLst/>
+          </a:prstGeom>
+        </p:spPr>
+        <p:txBody>
+          <a:bodyPr anchor="b"/>
+          <a:lstStyle/>
+          <a:p>
+            <a:pPr algn="r">
+              <a:defRPr sz="900">
+                <a:solidFill>
+                  <a:srgbClr val="9AA7B6"/>
+                </a:solidFill>
+                <a:latin typeface="Poppins"/>
+              </a:defRPr>
+            </a:pPr>
+            <a:r>
+              <a:rPr lang="fr-FR" sz="900">
+                <a:solidFill>
+                  <a:srgbClr val="9AA7B6"/>
+                </a:solidFill>
+                <a:latin typeface="Poppins"/>
+              </a:rPr>
+              <a:t>Université de Mostaganem — Dr. Madani BELACEL</a:t>
+            </a:r>
+          </a:p>
+        </p:txBody>
+      </p:sp>
     </p:spTree>
   </p:cSld>
   <p:clrMapOvr>
@@ -9683,9 +10016,7 @@
   <p:cSld>
     <p:bg>
       <p:bgPr>
-        <a:solidFill>
-          <a:srgbClr val="0B3D2E"/>
-        </a:solidFill>
+        <a:solidFill>val="004A38"/&gt;</a:solidFill>
         <a:effectLst/>
       </p:bgPr>
     </p:bg>
@@ -9710,9 +10041,7 @@
           <a:prstGeom prst="rect">
             <a:avLst/>
           </a:prstGeom>
-          <a:solidFill>
-            <a:srgbClr val="146B4A"/>
-          </a:solidFill>
+          <a:solidFill>val="007A55"/&gt;</a:solidFill>
           <a:ln>
             <a:noFill/>
           </a:ln>
@@ -9754,9 +10083,7 @@
           <a:prstGeom prst="rect">
             <a:avLst/>
           </a:prstGeom>
-          <a:solidFill>
-            <a:srgbClr val="FFD700"/>
-          </a:solidFill>
+          <a:solidFill>val="F0B429"/&gt;</a:solidFill>
           <a:ln>
             <a:noFill/>
           </a:ln>
@@ -9798,9 +10125,7 @@
           <a:prstGeom prst="rect">
             <a:avLst/>
           </a:prstGeom>
-          <a:solidFill>
-            <a:srgbClr val="FFD700"/>
-          </a:solidFill>
+          <a:solidFill>val="F0B429"/&gt;</a:solidFill>
           <a:ln>
             <a:noFill/>
           </a:ln>
@@ -9842,9 +10167,7 @@
           <a:prstGeom prst="rect">
             <a:avLst/>
           </a:prstGeom>
-          <a:solidFill>
-            <a:srgbClr val="146B4A"/>
-          </a:solidFill>
+          <a:solidFill>val="007A55"/&gt;</a:solidFill>
           <a:ln>
             <a:noFill/>
           </a:ln>
@@ -9897,10 +10220,8 @@
             <a:pPr algn="l"/>
             <a:r>
               <a:rPr sz="2400" b="1" i="0">
-                <a:solidFill>
-                  <a:srgbClr val="FFD700"/>
-                </a:solidFill>
-                <a:latin typeface="Calibri"/>
+                <a:solidFill>val="F0B429"/&gt;</a:solidFill>
+                <a:latin typeface="Poppins"/>
               </a:rPr>
               <a:t>2 - Cloud Computing</a:t>
             </a:r>
@@ -9921,9 +10242,7 @@
           <a:prstGeom prst="rect">
             <a:avLst/>
           </a:prstGeom>
-          <a:solidFill>
-            <a:srgbClr val="146B4A"/>
-          </a:solidFill>
+          <a:solidFill>val="007A55"/&gt;</a:solidFill>
           <a:ln>
             <a:noFill/>
           </a:ln>
@@ -9980,10 +10299,8 @@
             </a:pPr>
             <a:r>
               <a:rPr sz="1800">
-                <a:solidFill>
-                  <a:srgbClr val="FFFFFF"/>
-                </a:solidFill>
-                <a:latin typeface="Calibri"/>
+                <a:solidFill>val="FFFFFF"/&gt;</a:solidFill>
+                <a:latin typeface="Poppins"/>
               </a:rPr>
               <a:t>▪  Storage and computing on remote servers.</a:t>
             </a:r>
@@ -9996,10 +10313,8 @@
             </a:pPr>
             <a:r>
               <a:rPr sz="1800">
-                <a:solidFill>
-                  <a:srgbClr val="FFFFFF"/>
-                </a:solidFill>
-                <a:latin typeface="Calibri"/>
+                <a:solidFill>val="FFFFFF"/&gt;</a:solidFill>
+                <a:latin typeface="Poppins"/>
               </a:rPr>
               <a:t>▪  Access from any connected device.</a:t>
             </a:r>
@@ -10012,10 +10327,8 @@
             </a:pPr>
             <a:r>
               <a:rPr sz="1800">
-                <a:solidFill>
-                  <a:srgbClr val="FFFFFF"/>
-                </a:solidFill>
-                <a:latin typeface="Calibri"/>
+                <a:solidFill>val="FFFFFF"/&gt;</a:solidFill>
+                <a:latin typeface="Poppins"/>
               </a:rPr>
               <a:t>▪  Examples: Google Drive, OneDrive, Dropbox, iCloud.</a:t>
             </a:r>
@@ -10028,10 +10341,8 @@
             </a:pPr>
             <a:r>
               <a:rPr sz="1800">
-                <a:solidFill>
-                  <a:srgbClr val="FFFFFF"/>
-                </a:solidFill>
-                <a:latin typeface="Calibri"/>
+                <a:solidFill>val="FFFFFF"/&gt;</a:solidFill>
+                <a:latin typeface="Poppins"/>
               </a:rPr>
               <a:t>▪  Models: SaaS, PaaS, IaaS.</a:t>
             </a:r>
@@ -10044,10 +10355,8 @@
             </a:pPr>
             <a:r>
               <a:rPr sz="1800">
-                <a:solidFill>
-                  <a:srgbClr val="FFFFFF"/>
-                </a:solidFill>
-                <a:latin typeface="Calibri"/>
+                <a:solidFill>val="FFFFFF"/&gt;</a:solidFill>
+                <a:latin typeface="Poppins"/>
               </a:rPr>
               <a:t>▪  Benefits: backup, collaboration; limit: requires connectivity.</a:t>
             </a:r>
@@ -10078,6 +10387,47 @@
           </a:prstGeom>
         </p:spPr>
       </p:pic>
+      <p:sp>
+        <p:nvSpPr>
+          <p:cNvPr id="990001" name="Pied de page FLE"/>
+          <p:cNvSpPr>
+            <a:spLocks noGrp="1"/>
+          </p:cNvSpPr>
+          <p:nvPr/>
+        </p:nvSpPr>
+        <p:spPr>
+          <a:xfrm>
+            <a:off x="4343400" y="-329184"/>
+            <a:ext cx="4572000" cy="274320"/>
+          </a:xfrm>
+          <a:prstGeom prst="rect">
+            <a:avLst/>
+          </a:prstGeom>
+        </p:spPr>
+        <p:txBody>
+          <a:bodyPr anchor="b"/>
+          <a:lstStyle/>
+          <a:p>
+            <a:pPr algn="r">
+              <a:defRPr sz="900">
+                <a:solidFill>
+                  <a:srgbClr val="9AA7B6"/>
+                </a:solidFill>
+                <a:latin typeface="Poppins"/>
+              </a:defRPr>
+            </a:pPr>
+            <a:r>
+              <a:rPr lang="fr-FR" sz="900">
+                <a:solidFill>
+                  <a:srgbClr val="9AA7B6"/>
+                </a:solidFill>
+                <a:latin typeface="Poppins"/>
+              </a:rPr>
+              <a:t>Université de Mostaganem — Dr. Madani BELACEL</a:t>
+            </a:r>
+          </a:p>
+        </p:txBody>
+      </p:sp>
     </p:spTree>
   </p:cSld>
   <p:clrMapOvr>
@@ -10091,9 +10441,7 @@
   <p:cSld>
     <p:bg>
       <p:bgPr>
-        <a:solidFill>
-          <a:srgbClr val="0B3D2E"/>
-        </a:solidFill>
+        <a:solidFill>val="004A38"/&gt;</a:solidFill>
         <a:effectLst/>
       </p:bgPr>
     </p:bg>
@@ -10118,9 +10466,7 @@
           <a:prstGeom prst="rect">
             <a:avLst/>
           </a:prstGeom>
-          <a:solidFill>
-            <a:srgbClr val="146B4A"/>
-          </a:solidFill>
+          <a:solidFill>val="007A55"/&gt;</a:solidFill>
           <a:ln>
             <a:noFill/>
           </a:ln>
@@ -10162,9 +10508,7 @@
           <a:prstGeom prst="rect">
             <a:avLst/>
           </a:prstGeom>
-          <a:solidFill>
-            <a:srgbClr val="FFD700"/>
-          </a:solidFill>
+          <a:solidFill>val="F0B429"/&gt;</a:solidFill>
           <a:ln>
             <a:noFill/>
           </a:ln>
@@ -10206,9 +10550,7 @@
           <a:prstGeom prst="rect">
             <a:avLst/>
           </a:prstGeom>
-          <a:solidFill>
-            <a:srgbClr val="FFD700"/>
-          </a:solidFill>
+          <a:solidFill>val="F0B429"/&gt;</a:solidFill>
           <a:ln>
             <a:noFill/>
           </a:ln>
@@ -10250,9 +10592,7 @@
           <a:prstGeom prst="rect">
             <a:avLst/>
           </a:prstGeom>
-          <a:solidFill>
-            <a:srgbClr val="146B4A"/>
-          </a:solidFill>
+          <a:solidFill>val="007A55"/&gt;</a:solidFill>
           <a:ln>
             <a:noFill/>
           </a:ln>
@@ -10294,9 +10634,7 @@
           <a:prstGeom prst="rect">
             <a:avLst/>
           </a:prstGeom>
-          <a:solidFill>
-            <a:srgbClr val="146B4A"/>
-          </a:solidFill>
+          <a:solidFill>val="007A55"/&gt;</a:solidFill>
           <a:ln>
             <a:noFill/>
           </a:ln>
@@ -10349,10 +10687,8 @@
             <a:pPr algn="ctr"/>
             <a:r>
               <a:rPr sz="2200" b="1" i="0">
-                <a:solidFill>
-                  <a:srgbClr val="BBBBBB"/>
-                </a:solidFill>
-                <a:latin typeface="Calibri"/>
+                <a:solidFill>val="9AA7B6"/&gt;</a:solidFill>
+                <a:latin typeface="Poppins"/>
               </a:rPr>
               <a:t>Section 3</a:t>
             </a:r>
@@ -10384,10 +10720,8 @@
             <a:pPr algn="ctr"/>
             <a:r>
               <a:rPr sz="2800" b="1" i="0">
-                <a:solidFill>
-                  <a:srgbClr val="FFD700"/>
-                </a:solidFill>
-                <a:latin typeface="Calibri"/>
+                <a:solidFill>val="F0B429"/&gt;</a:solidFill>
+                <a:latin typeface="Poppins"/>
               </a:rPr>
               <a:t>Collaborative Work</a:t>
             </a:r>
@@ -10418,6 +10752,47 @@
           </a:prstGeom>
         </p:spPr>
       </p:pic>
+      <p:sp>
+        <p:nvSpPr>
+          <p:cNvPr id="990001" name="Pied de page FLE"/>
+          <p:cNvSpPr>
+            <a:spLocks noGrp="1"/>
+          </p:cNvSpPr>
+          <p:nvPr/>
+        </p:nvSpPr>
+        <p:spPr>
+          <a:xfrm>
+            <a:off x="4343400" y="-329184"/>
+            <a:ext cx="4572000" cy="274320"/>
+          </a:xfrm>
+          <a:prstGeom prst="rect">
+            <a:avLst/>
+          </a:prstGeom>
+        </p:spPr>
+        <p:txBody>
+          <a:bodyPr anchor="b"/>
+          <a:lstStyle/>
+          <a:p>
+            <a:pPr algn="r">
+              <a:defRPr sz="900">
+                <a:solidFill>
+                  <a:srgbClr val="9AA7B6"/>
+                </a:solidFill>
+                <a:latin typeface="Poppins"/>
+              </a:defRPr>
+            </a:pPr>
+            <a:r>
+              <a:rPr lang="fr-FR" sz="900">
+                <a:solidFill>
+                  <a:srgbClr val="9AA7B6"/>
+                </a:solidFill>
+                <a:latin typeface="Poppins"/>
+              </a:rPr>
+              <a:t>Université de Mostaganem — Dr. Madani BELACEL</a:t>
+            </a:r>
+          </a:p>
+        </p:txBody>
+      </p:sp>
     </p:spTree>
   </p:cSld>
   <p:clrMapOvr>
@@ -10431,9 +10806,7 @@
   <p:cSld>
     <p:bg>
       <p:bgPr>
-        <a:solidFill>
-          <a:srgbClr val="0B3D2E"/>
-        </a:solidFill>
+        <a:solidFill>val="004A38"/&gt;</a:solidFill>
         <a:effectLst/>
       </p:bgPr>
     </p:bg>
@@ -10458,9 +10831,7 @@
           <a:prstGeom prst="rect">
             <a:avLst/>
           </a:prstGeom>
-          <a:solidFill>
-            <a:srgbClr val="146B4A"/>
-          </a:solidFill>
+          <a:solidFill>val="007A55"/&gt;</a:solidFill>
           <a:ln>
             <a:noFill/>
           </a:ln>
@@ -10502,9 +10873,7 @@
           <a:prstGeom prst="rect">
             <a:avLst/>
           </a:prstGeom>
-          <a:solidFill>
-            <a:srgbClr val="FFD700"/>
-          </a:solidFill>
+          <a:solidFill>val="F0B429"/&gt;</a:solidFill>
           <a:ln>
             <a:noFill/>
           </a:ln>
@@ -10546,9 +10915,7 @@
           <a:prstGeom prst="rect">
             <a:avLst/>
           </a:prstGeom>
-          <a:solidFill>
-            <a:srgbClr val="FFD700"/>
-          </a:solidFill>
+          <a:solidFill>val="F0B429"/&gt;</a:solidFill>
           <a:ln>
             <a:noFill/>
           </a:ln>
@@ -10590,9 +10957,7 @@
           <a:prstGeom prst="rect">
             <a:avLst/>
           </a:prstGeom>
-          <a:solidFill>
-            <a:srgbClr val="146B4A"/>
-          </a:solidFill>
+          <a:solidFill>val="007A55"/&gt;</a:solidFill>
           <a:ln>
             <a:noFill/>
           </a:ln>
@@ -10645,10 +11010,8 @@
             <a:pPr algn="l"/>
             <a:r>
               <a:rPr sz="2400" b="1" i="0">
-                <a:solidFill>
-                  <a:srgbClr val="FFD700"/>
-                </a:solidFill>
-                <a:latin typeface="Calibri"/>
+                <a:solidFill>val="F0B429"/&gt;</a:solidFill>
+                <a:latin typeface="Poppins"/>
               </a:rPr>
               <a:t>3 - Collaborative Work</a:t>
             </a:r>
@@ -10669,9 +11032,7 @@
           <a:prstGeom prst="rect">
             <a:avLst/>
           </a:prstGeom>
-          <a:solidFill>
-            <a:srgbClr val="146B4A"/>
-          </a:solidFill>
+          <a:solidFill>val="007A55"/&gt;</a:solidFill>
           <a:ln>
             <a:noFill/>
           </a:ln>
@@ -10728,10 +11089,8 @@
             </a:pPr>
             <a:r>
               <a:rPr sz="1800">
-                <a:solidFill>
-                  <a:srgbClr val="FFFFFF"/>
-                </a:solidFill>
-                <a:latin typeface="Calibri"/>
+                <a:solidFill>val="FFFFFF"/&gt;</a:solidFill>
+                <a:latin typeface="Poppins"/>
               </a:rPr>
               <a:t>▪  Shared documents edited simultaneously (Google Docs, Office 365).</a:t>
             </a:r>
@@ -10744,10 +11103,8 @@
             </a:pPr>
             <a:r>
               <a:rPr sz="1800">
-                <a:solidFill>
-                  <a:srgbClr val="FFFFFF"/>
-                </a:solidFill>
-                <a:latin typeface="Calibri"/>
+                <a:solidFill>val="FFFFFF"/&gt;</a:solidFill>
+                <a:latin typeface="Poppins"/>
               </a:rPr>
               <a:t>▪  Project platforms: Trello, Teams, Slack.</a:t>
             </a:r>
@@ -10760,10 +11117,8 @@
             </a:pPr>
             <a:r>
               <a:rPr sz="1800">
-                <a:solidFill>
-                  <a:srgbClr val="FFFFFF"/>
-                </a:solidFill>
-                <a:latin typeface="Calibri"/>
+                <a:solidFill>val="FFFFFF"/&gt;</a:solidFill>
+                <a:latin typeface="Poppins"/>
               </a:rPr>
               <a:t>▪  Video conferencing: Meet, Zoom, Teams.</a:t>
             </a:r>
@@ -10776,10 +11131,8 @@
             </a:pPr>
             <a:r>
               <a:rPr sz="1800">
-                <a:solidFill>
-                  <a:srgbClr val="FFFFFF"/>
-                </a:solidFill>
-                <a:latin typeface="Calibri"/>
+                <a:solidFill>val="FFFFFF"/&gt;</a:solidFill>
+                <a:latin typeface="Poppins"/>
               </a:rPr>
               <a:t>▪  Wikis and co-writing spaces.</a:t>
             </a:r>
@@ -10810,6 +11163,47 @@
           </a:prstGeom>
         </p:spPr>
       </p:pic>
+      <p:sp>
+        <p:nvSpPr>
+          <p:cNvPr id="990001" name="Pied de page FLE"/>
+          <p:cNvSpPr>
+            <a:spLocks noGrp="1"/>
+          </p:cNvSpPr>
+          <p:nvPr/>
+        </p:nvSpPr>
+        <p:spPr>
+          <a:xfrm>
+            <a:off x="4343400" y="-329184"/>
+            <a:ext cx="4572000" cy="274320"/>
+          </a:xfrm>
+          <a:prstGeom prst="rect">
+            <a:avLst/>
+          </a:prstGeom>
+        </p:spPr>
+        <p:txBody>
+          <a:bodyPr anchor="b"/>
+          <a:lstStyle/>
+          <a:p>
+            <a:pPr algn="r">
+              <a:defRPr sz="900">
+                <a:solidFill>
+                  <a:srgbClr val="9AA7B6"/>
+                </a:solidFill>
+                <a:latin typeface="Poppins"/>
+              </a:defRPr>
+            </a:pPr>
+            <a:r>
+              <a:rPr lang="fr-FR" sz="900">
+                <a:solidFill>
+                  <a:srgbClr val="9AA7B6"/>
+                </a:solidFill>
+                <a:latin typeface="Poppins"/>
+              </a:rPr>
+              <a:t>Université de Mostaganem — Dr. Madani BELACEL</a:t>
+            </a:r>
+          </a:p>
+        </p:txBody>
+      </p:sp>
     </p:spTree>
   </p:cSld>
   <p:clrMapOvr>
@@ -10823,9 +11217,7 @@
   <p:cSld>
     <p:bg>
       <p:bgPr>
-        <a:solidFill>
-          <a:srgbClr val="0B3D2E"/>
-        </a:solidFill>
+        <a:solidFill>val="004A38"/&gt;</a:solidFill>
         <a:effectLst/>
       </p:bgPr>
     </p:bg>
@@ -10850,9 +11242,7 @@
           <a:prstGeom prst="rect">
             <a:avLst/>
           </a:prstGeom>
-          <a:solidFill>
-            <a:srgbClr val="146B4A"/>
-          </a:solidFill>
+          <a:solidFill>val="007A55"/&gt;</a:solidFill>
           <a:ln>
             <a:noFill/>
           </a:ln>
@@ -10894,9 +11284,7 @@
           <a:prstGeom prst="rect">
             <a:avLst/>
           </a:prstGeom>
-          <a:solidFill>
-            <a:srgbClr val="FFD700"/>
-          </a:solidFill>
+          <a:solidFill>val="F0B429"/&gt;</a:solidFill>
           <a:ln>
             <a:noFill/>
           </a:ln>
@@ -10938,9 +11326,7 @@
           <a:prstGeom prst="rect">
             <a:avLst/>
           </a:prstGeom>
-          <a:solidFill>
-            <a:srgbClr val="FFD700"/>
-          </a:solidFill>
+          <a:solidFill>val="F0B429"/&gt;</a:solidFill>
           <a:ln>
             <a:noFill/>
           </a:ln>
@@ -10982,9 +11368,7 @@
           <a:prstGeom prst="rect">
             <a:avLst/>
           </a:prstGeom>
-          <a:solidFill>
-            <a:srgbClr val="146B4A"/>
-          </a:solidFill>
+          <a:solidFill>val="007A55"/&gt;</a:solidFill>
           <a:ln>
             <a:noFill/>
           </a:ln>
@@ -11026,9 +11410,7 @@
           <a:prstGeom prst="rect">
             <a:avLst/>
           </a:prstGeom>
-          <a:solidFill>
-            <a:srgbClr val="146B4A"/>
-          </a:solidFill>
+          <a:solidFill>val="007A55"/&gt;</a:solidFill>
           <a:ln>
             <a:noFill/>
           </a:ln>
@@ -11081,10 +11463,8 @@
             <a:pPr algn="ctr"/>
             <a:r>
               <a:rPr sz="2200" b="1" i="0">
-                <a:solidFill>
-                  <a:srgbClr val="BBBBBB"/>
-                </a:solidFill>
-                <a:latin typeface="Calibri"/>
+                <a:solidFill>val="9AA7B6"/&gt;</a:solidFill>
+                <a:latin typeface="Poppins"/>
               </a:rPr>
               <a:t>Section 4</a:t>
             </a:r>
@@ -11116,10 +11496,8 @@
             <a:pPr algn="ctr"/>
             <a:r>
               <a:rPr sz="2800" b="1" i="0">
-                <a:solidFill>
-                  <a:srgbClr val="FFD700"/>
-                </a:solidFill>
-                <a:latin typeface="Calibri"/>
+                <a:solidFill>val="F0B429"/&gt;</a:solidFill>
+                <a:latin typeface="Poppins"/>
               </a:rPr>
               <a:t>E-commerce and Online Services</a:t>
             </a:r>
@@ -11150,6 +11528,47 @@
           </a:prstGeom>
         </p:spPr>
       </p:pic>
+      <p:sp>
+        <p:nvSpPr>
+          <p:cNvPr id="990001" name="Pied de page FLE"/>
+          <p:cNvSpPr>
+            <a:spLocks noGrp="1"/>
+          </p:cNvSpPr>
+          <p:nvPr/>
+        </p:nvSpPr>
+        <p:spPr>
+          <a:xfrm>
+            <a:off x="4343400" y="-329184"/>
+            <a:ext cx="4572000" cy="274320"/>
+          </a:xfrm>
+          <a:prstGeom prst="rect">
+            <a:avLst/>
+          </a:prstGeom>
+        </p:spPr>
+        <p:txBody>
+          <a:bodyPr anchor="b"/>
+          <a:lstStyle/>
+          <a:p>
+            <a:pPr algn="r">
+              <a:defRPr sz="900">
+                <a:solidFill>
+                  <a:srgbClr val="9AA7B6"/>
+                </a:solidFill>
+                <a:latin typeface="Poppins"/>
+              </a:defRPr>
+            </a:pPr>
+            <a:r>
+              <a:rPr lang="fr-FR" sz="900">
+                <a:solidFill>
+                  <a:srgbClr val="9AA7B6"/>
+                </a:solidFill>
+                <a:latin typeface="Poppins"/>
+              </a:rPr>
+              <a:t>Université de Mostaganem — Dr. Madani BELACEL</a:t>
+            </a:r>
+          </a:p>
+        </p:txBody>
+      </p:sp>
     </p:spTree>
   </p:cSld>
   <p:clrMapOvr>
@@ -11201,7 +11620,7 @@
     </a:clrScheme>
     <a:fontScheme name="Office">
       <a:majorFont>
-        <a:latin typeface="Calibri"/>
+        <a:latin typeface="Poppins"/>
         <a:ea typeface=""/>
         <a:cs typeface=""/>
         <a:font script="Jpan" typeface="ＭＳ Ｐゴシック"/>
@@ -11236,7 +11655,7 @@
         <a:font script="Geor" typeface="Sylfaen"/>
       </a:majorFont>
       <a:minorFont>
-        <a:latin typeface="Calibri"/>
+        <a:latin typeface="Poppins"/>
         <a:ea typeface=""/>
         <a:cs typeface=""/>
         <a:font script="Jpan" typeface="ＭＳ Ｐゴシック"/>
